--- a/docs/plots/carbo/jx_carbo_adjcif_anyhosp.pptx
+++ b/docs/plots/carbo/jx_carbo_adjcif_anyhosp.pptx
@@ -2271,7 +2271,7 @@
           </p:nvSpPr>
           <p:spPr>
             <a:xfrm>
-              <a:off x="910695" y="5217175"/>
+              <a:off x="910695" y="5215896"/>
               <a:ext cx="7706515" cy="0"/>
             </a:xfrm>
             <a:custGeom>
@@ -2314,7 +2314,7 @@
           </p:nvSpPr>
           <p:spPr>
             <a:xfrm>
-              <a:off x="910695" y="4490682"/>
+              <a:off x="910695" y="4486843"/>
               <a:ext cx="7706515" cy="0"/>
             </a:xfrm>
             <a:custGeom>
@@ -2357,7 +2357,7 @@
           </p:nvSpPr>
           <p:spPr>
             <a:xfrm>
-              <a:off x="910695" y="3764188"/>
+              <a:off x="910695" y="3757791"/>
               <a:ext cx="7706515" cy="0"/>
             </a:xfrm>
             <a:custGeom>
@@ -2400,7 +2400,7 @@
           </p:nvSpPr>
           <p:spPr>
             <a:xfrm>
-              <a:off x="910695" y="3037695"/>
+              <a:off x="910695" y="3028739"/>
               <a:ext cx="7706515" cy="0"/>
             </a:xfrm>
             <a:custGeom>
@@ -2658,7 +2658,7 @@
           </p:nvSpPr>
           <p:spPr>
             <a:xfrm>
-              <a:off x="910695" y="4853928"/>
+              <a:off x="910695" y="4851370"/>
               <a:ext cx="7706515" cy="0"/>
             </a:xfrm>
             <a:custGeom>
@@ -2701,7 +2701,7 @@
           </p:nvSpPr>
           <p:spPr>
             <a:xfrm>
-              <a:off x="910695" y="4127435"/>
+              <a:off x="910695" y="4122317"/>
               <a:ext cx="7706515" cy="0"/>
             </a:xfrm>
             <a:custGeom>
@@ -2744,7 +2744,7 @@
           </p:nvSpPr>
           <p:spPr>
             <a:xfrm>
-              <a:off x="910695" y="3400942"/>
+              <a:off x="910695" y="3393265"/>
               <a:ext cx="7706515" cy="0"/>
             </a:xfrm>
             <a:custGeom>
@@ -2787,7 +2787,7 @@
           </p:nvSpPr>
           <p:spPr>
             <a:xfrm>
-              <a:off x="910695" y="2674448"/>
+              <a:off x="910695" y="2664213"/>
               <a:ext cx="7706515" cy="0"/>
             </a:xfrm>
             <a:custGeom>
@@ -3045,132 +3045,132 @@
           </p:nvSpPr>
           <p:spPr>
             <a:xfrm>
-              <a:off x="1260991" y="4385641"/>
-              <a:ext cx="7005923" cy="1119035"/>
+              <a:off x="1260991" y="4368116"/>
+              <a:ext cx="7005923" cy="1135911"/>
             </a:xfrm>
             <a:custGeom>
               <a:avLst/>
               <a:pathLst>
-                <a:path w="7005923" h="1119035">
+                <a:path w="7005923" h="1135911">
                   <a:moveTo>
-                    <a:pt x="0" y="1119035"/>
+                    <a:pt x="0" y="1135911"/>
                   </a:moveTo>
                   <a:lnTo>
-                    <a:pt x="276549" y="1119035"/>
-                  </a:lnTo>
-                  <a:lnTo>
-                    <a:pt x="276549" y="1079998"/>
-                  </a:lnTo>
-                  <a:lnTo>
-                    <a:pt x="368732" y="1079998"/>
-                  </a:lnTo>
-                  <a:lnTo>
-                    <a:pt x="368732" y="963850"/>
-                  </a:lnTo>
-                  <a:lnTo>
-                    <a:pt x="553099" y="963850"/>
-                  </a:lnTo>
-                  <a:lnTo>
-                    <a:pt x="553099" y="884808"/>
-                  </a:lnTo>
-                  <a:lnTo>
-                    <a:pt x="737465" y="884808"/>
-                  </a:lnTo>
-                  <a:lnTo>
-                    <a:pt x="737465" y="845006"/>
-                  </a:lnTo>
-                  <a:lnTo>
-                    <a:pt x="829648" y="845006"/>
-                  </a:lnTo>
-                  <a:lnTo>
-                    <a:pt x="829648" y="804919"/>
-                  </a:lnTo>
-                  <a:lnTo>
-                    <a:pt x="921832" y="804919"/>
-                  </a:lnTo>
-                  <a:lnTo>
-                    <a:pt x="921832" y="723350"/>
-                  </a:lnTo>
-                  <a:lnTo>
-                    <a:pt x="1198381" y="723350"/>
-                  </a:lnTo>
-                  <a:lnTo>
-                    <a:pt x="1198381" y="682069"/>
-                  </a:lnTo>
-                  <a:lnTo>
-                    <a:pt x="1382748" y="682069"/>
-                  </a:lnTo>
-                  <a:lnTo>
-                    <a:pt x="1382748" y="640710"/>
-                  </a:lnTo>
-                  <a:lnTo>
-                    <a:pt x="1474931" y="640710"/>
-                  </a:lnTo>
-                  <a:lnTo>
-                    <a:pt x="1474931" y="558495"/>
-                  </a:lnTo>
-                  <a:lnTo>
-                    <a:pt x="1843664" y="558495"/>
-                  </a:lnTo>
-                  <a:lnTo>
-                    <a:pt x="1843664" y="516567"/>
-                  </a:lnTo>
-                  <a:lnTo>
-                    <a:pt x="2120213" y="516567"/>
-                  </a:lnTo>
-                  <a:lnTo>
-                    <a:pt x="2120213" y="474778"/>
-                  </a:lnTo>
-                  <a:lnTo>
-                    <a:pt x="2304580" y="474778"/>
-                  </a:lnTo>
-                  <a:lnTo>
-                    <a:pt x="2304580" y="432870"/>
-                  </a:lnTo>
-                  <a:lnTo>
-                    <a:pt x="2396763" y="432870"/>
-                  </a:lnTo>
-                  <a:lnTo>
-                    <a:pt x="2396763" y="348195"/>
-                  </a:lnTo>
-                  <a:lnTo>
-                    <a:pt x="2857679" y="348195"/>
-                  </a:lnTo>
-                  <a:lnTo>
-                    <a:pt x="2857679" y="305041"/>
-                  </a:lnTo>
-                  <a:lnTo>
-                    <a:pt x="3134228" y="305041"/>
-                  </a:lnTo>
-                  <a:lnTo>
-                    <a:pt x="3134228" y="262052"/>
-                  </a:lnTo>
-                  <a:lnTo>
-                    <a:pt x="3410778" y="262052"/>
-                  </a:lnTo>
-                  <a:lnTo>
-                    <a:pt x="3410778" y="219194"/>
-                  </a:lnTo>
-                  <a:lnTo>
-                    <a:pt x="3963877" y="219194"/>
-                  </a:lnTo>
-                  <a:lnTo>
-                    <a:pt x="3963877" y="176366"/>
-                  </a:lnTo>
-                  <a:lnTo>
-                    <a:pt x="4424793" y="176366"/>
-                  </a:lnTo>
-                  <a:lnTo>
-                    <a:pt x="4424793" y="132948"/>
-                  </a:lnTo>
-                  <a:lnTo>
-                    <a:pt x="6913740" y="132948"/>
-                  </a:lnTo>
-                  <a:lnTo>
-                    <a:pt x="6913740" y="45767"/>
-                  </a:lnTo>
-                  <a:lnTo>
-                    <a:pt x="7005923" y="45767"/>
+                    <a:pt x="276549" y="1135911"/>
+                  </a:lnTo>
+                  <a:lnTo>
+                    <a:pt x="276549" y="1096955"/>
+                  </a:lnTo>
+                  <a:lnTo>
+                    <a:pt x="368732" y="1096955"/>
+                  </a:lnTo>
+                  <a:lnTo>
+                    <a:pt x="368732" y="980848"/>
+                  </a:lnTo>
+                  <a:lnTo>
+                    <a:pt x="553099" y="980848"/>
+                  </a:lnTo>
+                  <a:lnTo>
+                    <a:pt x="553099" y="901658"/>
+                  </a:lnTo>
+                  <a:lnTo>
+                    <a:pt x="737465" y="901658"/>
+                  </a:lnTo>
+                  <a:lnTo>
+                    <a:pt x="737465" y="861715"/>
+                  </a:lnTo>
+                  <a:lnTo>
+                    <a:pt x="829648" y="861715"/>
+                  </a:lnTo>
+                  <a:lnTo>
+                    <a:pt x="829648" y="821397"/>
+                  </a:lnTo>
+                  <a:lnTo>
+                    <a:pt x="921832" y="821397"/>
+                  </a:lnTo>
+                  <a:lnTo>
+                    <a:pt x="921832" y="739403"/>
+                  </a:lnTo>
+                  <a:lnTo>
+                    <a:pt x="1198381" y="739403"/>
+                  </a:lnTo>
+                  <a:lnTo>
+                    <a:pt x="1198381" y="697219"/>
+                  </a:lnTo>
+                  <a:lnTo>
+                    <a:pt x="1382748" y="697219"/>
+                  </a:lnTo>
+                  <a:lnTo>
+                    <a:pt x="1382748" y="655076"/>
+                  </a:lnTo>
+                  <a:lnTo>
+                    <a:pt x="1474931" y="655076"/>
+                  </a:lnTo>
+                  <a:lnTo>
+                    <a:pt x="1474931" y="571260"/>
+                  </a:lnTo>
+                  <a:lnTo>
+                    <a:pt x="1843664" y="571260"/>
+                  </a:lnTo>
+                  <a:lnTo>
+                    <a:pt x="1843664" y="528497"/>
+                  </a:lnTo>
+                  <a:lnTo>
+                    <a:pt x="2120213" y="528497"/>
+                  </a:lnTo>
+                  <a:lnTo>
+                    <a:pt x="2120213" y="485797"/>
+                  </a:lnTo>
+                  <a:lnTo>
+                    <a:pt x="2304580" y="485797"/>
+                  </a:lnTo>
+                  <a:lnTo>
+                    <a:pt x="2304580" y="443006"/>
+                  </a:lnTo>
+                  <a:lnTo>
+                    <a:pt x="2396763" y="443006"/>
+                  </a:lnTo>
+                  <a:lnTo>
+                    <a:pt x="2396763" y="356144"/>
+                  </a:lnTo>
+                  <a:lnTo>
+                    <a:pt x="2857679" y="356144"/>
+                  </a:lnTo>
+                  <a:lnTo>
+                    <a:pt x="2857679" y="311903"/>
+                  </a:lnTo>
+                  <a:lnTo>
+                    <a:pt x="3134228" y="311903"/>
+                  </a:lnTo>
+                  <a:lnTo>
+                    <a:pt x="3134228" y="267829"/>
+                  </a:lnTo>
+                  <a:lnTo>
+                    <a:pt x="3410778" y="267829"/>
+                  </a:lnTo>
+                  <a:lnTo>
+                    <a:pt x="3410778" y="223838"/>
+                  </a:lnTo>
+                  <a:lnTo>
+                    <a:pt x="3963877" y="223838"/>
+                  </a:lnTo>
+                  <a:lnTo>
+                    <a:pt x="3963877" y="179836"/>
+                  </a:lnTo>
+                  <a:lnTo>
+                    <a:pt x="4424793" y="179836"/>
+                  </a:lnTo>
+                  <a:lnTo>
+                    <a:pt x="4424793" y="135204"/>
+                  </a:lnTo>
+                  <a:lnTo>
+                    <a:pt x="6913740" y="135204"/>
+                  </a:lnTo>
+                  <a:lnTo>
+                    <a:pt x="6913740" y="46025"/>
+                  </a:lnTo>
+                  <a:lnTo>
+                    <a:pt x="7005923" y="46025"/>
                   </a:lnTo>
                   <a:lnTo>
                     <a:pt x="7005923" y="0"/>
@@ -3203,131 +3203,131 @@
           <p:spPr>
             <a:xfrm>
               <a:off x="1260991" y="2861938"/>
-              <a:ext cx="7005923" cy="2518481"/>
+              <a:ext cx="7005923" cy="2521417"/>
             </a:xfrm>
             <a:custGeom>
               <a:avLst/>
               <a:pathLst>
-                <a:path w="7005923" h="2518481">
+                <a:path w="7005923" h="2521417">
                   <a:moveTo>
-                    <a:pt x="0" y="2518481"/>
+                    <a:pt x="0" y="2521417"/>
                   </a:moveTo>
                   <a:lnTo>
-                    <a:pt x="276549" y="2518481"/>
-                  </a:lnTo>
-                  <a:lnTo>
-                    <a:pt x="276549" y="2416966"/>
-                  </a:lnTo>
-                  <a:lnTo>
-                    <a:pt x="368732" y="2416966"/>
-                  </a:lnTo>
-                  <a:lnTo>
-                    <a:pt x="368732" y="2121132"/>
-                  </a:lnTo>
-                  <a:lnTo>
-                    <a:pt x="553099" y="2121132"/>
-                  </a:lnTo>
-                  <a:lnTo>
-                    <a:pt x="553099" y="1925036"/>
-                  </a:lnTo>
-                  <a:lnTo>
-                    <a:pt x="737465" y="1925036"/>
-                  </a:lnTo>
-                  <a:lnTo>
-                    <a:pt x="737465" y="1827872"/>
-                  </a:lnTo>
-                  <a:lnTo>
-                    <a:pt x="829648" y="1827872"/>
-                  </a:lnTo>
-                  <a:lnTo>
-                    <a:pt x="829648" y="1731071"/>
-                  </a:lnTo>
-                  <a:lnTo>
-                    <a:pt x="921832" y="1731071"/>
-                  </a:lnTo>
-                  <a:lnTo>
-                    <a:pt x="921832" y="1537345"/>
-                  </a:lnTo>
-                  <a:lnTo>
-                    <a:pt x="1198381" y="1537345"/>
-                  </a:lnTo>
-                  <a:lnTo>
-                    <a:pt x="1198381" y="1440945"/>
-                  </a:lnTo>
-                  <a:lnTo>
-                    <a:pt x="1382748" y="1440945"/>
-                  </a:lnTo>
-                  <a:lnTo>
-                    <a:pt x="1382748" y="1345460"/>
-                  </a:lnTo>
-                  <a:lnTo>
-                    <a:pt x="1474931" y="1345460"/>
-                  </a:lnTo>
-                  <a:lnTo>
-                    <a:pt x="1474931" y="1158872"/>
-                  </a:lnTo>
-                  <a:lnTo>
-                    <a:pt x="1843664" y="1158872"/>
-                  </a:lnTo>
-                  <a:lnTo>
-                    <a:pt x="1843664" y="1065347"/>
-                  </a:lnTo>
-                  <a:lnTo>
-                    <a:pt x="2120213" y="1065347"/>
-                  </a:lnTo>
-                  <a:lnTo>
-                    <a:pt x="2120213" y="973221"/>
-                  </a:lnTo>
-                  <a:lnTo>
-                    <a:pt x="2304580" y="973221"/>
-                  </a:lnTo>
-                  <a:lnTo>
-                    <a:pt x="2304580" y="881910"/>
-                  </a:lnTo>
-                  <a:lnTo>
-                    <a:pt x="2396763" y="881910"/>
-                  </a:lnTo>
-                  <a:lnTo>
-                    <a:pt x="2396763" y="700688"/>
-                  </a:lnTo>
-                  <a:lnTo>
-                    <a:pt x="2857679" y="700688"/>
-                  </a:lnTo>
-                  <a:lnTo>
-                    <a:pt x="2857679" y="609989"/>
-                  </a:lnTo>
-                  <a:lnTo>
-                    <a:pt x="3134228" y="609989"/>
-                  </a:lnTo>
-                  <a:lnTo>
-                    <a:pt x="3134228" y="520743"/>
-                  </a:lnTo>
-                  <a:lnTo>
-                    <a:pt x="3410778" y="520743"/>
-                  </a:lnTo>
-                  <a:lnTo>
-                    <a:pt x="3410778" y="432855"/>
-                  </a:lnTo>
-                  <a:lnTo>
-                    <a:pt x="3963877" y="432855"/>
-                  </a:lnTo>
-                  <a:lnTo>
-                    <a:pt x="3963877" y="346102"/>
-                  </a:lnTo>
-                  <a:lnTo>
-                    <a:pt x="4424793" y="346102"/>
-                  </a:lnTo>
-                  <a:lnTo>
-                    <a:pt x="4424793" y="259245"/>
-                  </a:lnTo>
-                  <a:lnTo>
-                    <a:pt x="6913740" y="259245"/>
-                  </a:lnTo>
-                  <a:lnTo>
-                    <a:pt x="6913740" y="88111"/>
-                  </a:lnTo>
-                  <a:lnTo>
-                    <a:pt x="7005923" y="88111"/>
+                    <a:pt x="276549" y="2521417"/>
+                  </a:lnTo>
+                  <a:lnTo>
+                    <a:pt x="276549" y="2422329"/>
+                  </a:lnTo>
+                  <a:lnTo>
+                    <a:pt x="368732" y="2422329"/>
+                  </a:lnTo>
+                  <a:lnTo>
+                    <a:pt x="368732" y="2132572"/>
+                  </a:lnTo>
+                  <a:lnTo>
+                    <a:pt x="553099" y="2132572"/>
+                  </a:lnTo>
+                  <a:lnTo>
+                    <a:pt x="553099" y="1939675"/>
+                  </a:lnTo>
+                  <a:lnTo>
+                    <a:pt x="737465" y="1939675"/>
+                  </a:lnTo>
+                  <a:lnTo>
+                    <a:pt x="737465" y="1843816"/>
+                  </a:lnTo>
+                  <a:lnTo>
+                    <a:pt x="829648" y="1843816"/>
+                  </a:lnTo>
+                  <a:lnTo>
+                    <a:pt x="829648" y="1748029"/>
+                  </a:lnTo>
+                  <a:lnTo>
+                    <a:pt x="921832" y="1748029"/>
+                  </a:lnTo>
+                  <a:lnTo>
+                    <a:pt x="921832" y="1556216"/>
+                  </a:lnTo>
+                  <a:lnTo>
+                    <a:pt x="1198381" y="1556216"/>
+                  </a:lnTo>
+                  <a:lnTo>
+                    <a:pt x="1198381" y="1459081"/>
+                  </a:lnTo>
+                  <a:lnTo>
+                    <a:pt x="1382748" y="1459081"/>
+                  </a:lnTo>
+                  <a:lnTo>
+                    <a:pt x="1382748" y="1363082"/>
+                  </a:lnTo>
+                  <a:lnTo>
+                    <a:pt x="1474931" y="1363082"/>
+                  </a:lnTo>
+                  <a:lnTo>
+                    <a:pt x="1474931" y="1175222"/>
+                  </a:lnTo>
+                  <a:lnTo>
+                    <a:pt x="1843664" y="1175222"/>
+                  </a:lnTo>
+                  <a:lnTo>
+                    <a:pt x="1843664" y="1080937"/>
+                  </a:lnTo>
+                  <a:lnTo>
+                    <a:pt x="2120213" y="1080937"/>
+                  </a:lnTo>
+                  <a:lnTo>
+                    <a:pt x="2120213" y="987836"/>
+                  </a:lnTo>
+                  <a:lnTo>
+                    <a:pt x="2304580" y="987836"/>
+                  </a:lnTo>
+                  <a:lnTo>
+                    <a:pt x="2304580" y="895575"/>
+                  </a:lnTo>
+                  <a:lnTo>
+                    <a:pt x="2396763" y="895575"/>
+                  </a:lnTo>
+                  <a:lnTo>
+                    <a:pt x="2396763" y="711467"/>
+                  </a:lnTo>
+                  <a:lnTo>
+                    <a:pt x="2857679" y="711467"/>
+                  </a:lnTo>
+                  <a:lnTo>
+                    <a:pt x="2857679" y="619315"/>
+                  </a:lnTo>
+                  <a:lnTo>
+                    <a:pt x="3134228" y="619315"/>
+                  </a:lnTo>
+                  <a:lnTo>
+                    <a:pt x="3134228" y="528590"/>
+                  </a:lnTo>
+                  <a:lnTo>
+                    <a:pt x="3410778" y="528590"/>
+                  </a:lnTo>
+                  <a:lnTo>
+                    <a:pt x="3410778" y="439102"/>
+                  </a:lnTo>
+                  <a:lnTo>
+                    <a:pt x="3963877" y="439102"/>
+                  </a:lnTo>
+                  <a:lnTo>
+                    <a:pt x="3963877" y="350650"/>
+                  </a:lnTo>
+                  <a:lnTo>
+                    <a:pt x="4424793" y="350650"/>
+                  </a:lnTo>
+                  <a:lnTo>
+                    <a:pt x="4424793" y="262006"/>
+                  </a:lnTo>
+                  <a:lnTo>
+                    <a:pt x="6913740" y="262006"/>
+                  </a:lnTo>
+                  <a:lnTo>
+                    <a:pt x="6913740" y="88096"/>
+                  </a:lnTo>
+                  <a:lnTo>
+                    <a:pt x="7005923" y="88096"/>
                   </a:lnTo>
                   <a:lnTo>
                     <a:pt x="7005923" y="0"/>
@@ -3405,7 +3405,7 @@
           </p:nvSpPr>
           <p:spPr>
             <a:xfrm>
-              <a:off x="692708" y="4813878"/>
+              <a:off x="692708" y="4811319"/>
               <a:ext cx="155356" cy="80101"/>
             </a:xfrm>
             <a:prstGeom prst="rect">
@@ -3451,7 +3451,7 @@
           </p:nvSpPr>
           <p:spPr>
             <a:xfrm>
-              <a:off x="692708" y="4087384"/>
+              <a:off x="692708" y="4082267"/>
               <a:ext cx="155356" cy="80101"/>
             </a:xfrm>
             <a:prstGeom prst="rect">
@@ -3497,7 +3497,7 @@
           </p:nvSpPr>
           <p:spPr>
             <a:xfrm>
-              <a:off x="692708" y="3360891"/>
+              <a:off x="692708" y="3353214"/>
               <a:ext cx="155356" cy="80101"/>
             </a:xfrm>
             <a:prstGeom prst="rect">
@@ -3543,7 +3543,7 @@
           </p:nvSpPr>
           <p:spPr>
             <a:xfrm>
-              <a:off x="692708" y="2634397"/>
+              <a:off x="692708" y="2624162"/>
               <a:ext cx="155356" cy="80101"/>
             </a:xfrm>
             <a:prstGeom prst="rect">
@@ -4116,7 +4116,7 @@
                   <a:latin typeface="Helvetica"/>
                   <a:cs typeface="Helvetica"/>
                 </a:rPr>
-                <a:t>Discrep &gt;= +25 vs &lt;+25: subHR = 2.67 (95% CI 1.20-5.91), p = 0.016</a:t>
+                <a:t>Discrep &gt;= +25 vs &lt;+25: subHR = 2.60 (95% CI 1.22-5.58), p = 0.014</a:t>
               </a:r>
             </a:p>
           </p:txBody>

--- a/docs/plots/carbo/jx_carbo_adjcif_anyhosp.pptx
+++ b/docs/plots/carbo/jx_carbo_adjcif_anyhosp.pptx
@@ -2271,7 +2271,7 @@
           </p:nvSpPr>
           <p:spPr>
             <a:xfrm>
-              <a:off x="910695" y="5215896"/>
+              <a:off x="910695" y="5219880"/>
               <a:ext cx="7706515" cy="0"/>
             </a:xfrm>
             <a:custGeom>
@@ -2314,7 +2314,7 @@
           </p:nvSpPr>
           <p:spPr>
             <a:xfrm>
-              <a:off x="910695" y="4486843"/>
+              <a:off x="910695" y="4498795"/>
               <a:ext cx="7706515" cy="0"/>
             </a:xfrm>
             <a:custGeom>
@@ -2357,7 +2357,7 @@
           </p:nvSpPr>
           <p:spPr>
             <a:xfrm>
-              <a:off x="910695" y="3757791"/>
+              <a:off x="910695" y="3777711"/>
               <a:ext cx="7706515" cy="0"/>
             </a:xfrm>
             <a:custGeom>
@@ -2400,7 +2400,7 @@
           </p:nvSpPr>
           <p:spPr>
             <a:xfrm>
-              <a:off x="910695" y="3028739"/>
+              <a:off x="910695" y="3056627"/>
               <a:ext cx="7706515" cy="0"/>
             </a:xfrm>
             <a:custGeom>
@@ -2658,7 +2658,7 @@
           </p:nvSpPr>
           <p:spPr>
             <a:xfrm>
-              <a:off x="910695" y="4851370"/>
+              <a:off x="910695" y="4859338"/>
               <a:ext cx="7706515" cy="0"/>
             </a:xfrm>
             <a:custGeom>
@@ -2701,7 +2701,7 @@
           </p:nvSpPr>
           <p:spPr>
             <a:xfrm>
-              <a:off x="910695" y="4122317"/>
+              <a:off x="910695" y="4138253"/>
               <a:ext cx="7706515" cy="0"/>
             </a:xfrm>
             <a:custGeom>
@@ -2744,7 +2744,7 @@
           </p:nvSpPr>
           <p:spPr>
             <a:xfrm>
-              <a:off x="910695" y="3393265"/>
+              <a:off x="910695" y="3417169"/>
               <a:ext cx="7706515" cy="0"/>
             </a:xfrm>
             <a:custGeom>
@@ -2787,7 +2787,7 @@
           </p:nvSpPr>
           <p:spPr>
             <a:xfrm>
-              <a:off x="910695" y="2664213"/>
+              <a:off x="910695" y="2696085"/>
               <a:ext cx="7706515" cy="0"/>
             </a:xfrm>
             <a:custGeom>
@@ -3045,132 +3045,132 @@
           </p:nvSpPr>
           <p:spPr>
             <a:xfrm>
-              <a:off x="1260991" y="4368116"/>
-              <a:ext cx="7005923" cy="1135911"/>
+              <a:off x="1260991" y="4392822"/>
+              <a:ext cx="7005923" cy="1112407"/>
             </a:xfrm>
             <a:custGeom>
               <a:avLst/>
               <a:pathLst>
-                <a:path w="7005923" h="1135911">
+                <a:path w="7005923" h="1112407">
                   <a:moveTo>
-                    <a:pt x="0" y="1135911"/>
+                    <a:pt x="0" y="1112407"/>
                   </a:moveTo>
                   <a:lnTo>
-                    <a:pt x="276549" y="1135911"/>
-                  </a:lnTo>
-                  <a:lnTo>
-                    <a:pt x="276549" y="1096955"/>
-                  </a:lnTo>
-                  <a:lnTo>
-                    <a:pt x="368732" y="1096955"/>
-                  </a:lnTo>
-                  <a:lnTo>
-                    <a:pt x="368732" y="980848"/>
-                  </a:lnTo>
-                  <a:lnTo>
-                    <a:pt x="553099" y="980848"/>
-                  </a:lnTo>
-                  <a:lnTo>
-                    <a:pt x="553099" y="901658"/>
-                  </a:lnTo>
-                  <a:lnTo>
-                    <a:pt x="737465" y="901658"/>
-                  </a:lnTo>
-                  <a:lnTo>
-                    <a:pt x="737465" y="861715"/>
-                  </a:lnTo>
-                  <a:lnTo>
-                    <a:pt x="829648" y="861715"/>
-                  </a:lnTo>
-                  <a:lnTo>
-                    <a:pt x="829648" y="821397"/>
-                  </a:lnTo>
-                  <a:lnTo>
-                    <a:pt x="921832" y="821397"/>
-                  </a:lnTo>
-                  <a:lnTo>
-                    <a:pt x="921832" y="739403"/>
-                  </a:lnTo>
-                  <a:lnTo>
-                    <a:pt x="1198381" y="739403"/>
-                  </a:lnTo>
-                  <a:lnTo>
-                    <a:pt x="1198381" y="697219"/>
-                  </a:lnTo>
-                  <a:lnTo>
-                    <a:pt x="1382748" y="697219"/>
-                  </a:lnTo>
-                  <a:lnTo>
-                    <a:pt x="1382748" y="655076"/>
-                  </a:lnTo>
-                  <a:lnTo>
-                    <a:pt x="1474931" y="655076"/>
-                  </a:lnTo>
-                  <a:lnTo>
-                    <a:pt x="1474931" y="571260"/>
-                  </a:lnTo>
-                  <a:lnTo>
-                    <a:pt x="1843664" y="571260"/>
-                  </a:lnTo>
-                  <a:lnTo>
-                    <a:pt x="1843664" y="528497"/>
-                  </a:lnTo>
-                  <a:lnTo>
-                    <a:pt x="2120213" y="528497"/>
-                  </a:lnTo>
-                  <a:lnTo>
-                    <a:pt x="2120213" y="485797"/>
-                  </a:lnTo>
-                  <a:lnTo>
-                    <a:pt x="2304580" y="485797"/>
-                  </a:lnTo>
-                  <a:lnTo>
-                    <a:pt x="2304580" y="443006"/>
-                  </a:lnTo>
-                  <a:lnTo>
-                    <a:pt x="2396763" y="443006"/>
-                  </a:lnTo>
-                  <a:lnTo>
-                    <a:pt x="2396763" y="356144"/>
-                  </a:lnTo>
-                  <a:lnTo>
-                    <a:pt x="2857679" y="356144"/>
-                  </a:lnTo>
-                  <a:lnTo>
-                    <a:pt x="2857679" y="311903"/>
-                  </a:lnTo>
-                  <a:lnTo>
-                    <a:pt x="3134228" y="311903"/>
-                  </a:lnTo>
-                  <a:lnTo>
-                    <a:pt x="3134228" y="267829"/>
-                  </a:lnTo>
-                  <a:lnTo>
-                    <a:pt x="3410778" y="267829"/>
-                  </a:lnTo>
-                  <a:lnTo>
-                    <a:pt x="3410778" y="223838"/>
-                  </a:lnTo>
-                  <a:lnTo>
-                    <a:pt x="3963877" y="223838"/>
-                  </a:lnTo>
-                  <a:lnTo>
-                    <a:pt x="3963877" y="179836"/>
-                  </a:lnTo>
-                  <a:lnTo>
-                    <a:pt x="4424793" y="179836"/>
-                  </a:lnTo>
-                  <a:lnTo>
-                    <a:pt x="4424793" y="135204"/>
-                  </a:lnTo>
-                  <a:lnTo>
-                    <a:pt x="6913740" y="135204"/>
-                  </a:lnTo>
-                  <a:lnTo>
-                    <a:pt x="6913740" y="46025"/>
-                  </a:lnTo>
-                  <a:lnTo>
-                    <a:pt x="7005923" y="46025"/>
+                    <a:pt x="276549" y="1112407"/>
+                  </a:lnTo>
+                  <a:lnTo>
+                    <a:pt x="276549" y="1074168"/>
+                  </a:lnTo>
+                  <a:lnTo>
+                    <a:pt x="368732" y="1074168"/>
+                  </a:lnTo>
+                  <a:lnTo>
+                    <a:pt x="368732" y="960096"/>
+                  </a:lnTo>
+                  <a:lnTo>
+                    <a:pt x="553099" y="960096"/>
+                  </a:lnTo>
+                  <a:lnTo>
+                    <a:pt x="553099" y="882702"/>
+                  </a:lnTo>
+                  <a:lnTo>
+                    <a:pt x="737465" y="882702"/>
+                  </a:lnTo>
+                  <a:lnTo>
+                    <a:pt x="737465" y="843625"/>
+                  </a:lnTo>
+                  <a:lnTo>
+                    <a:pt x="829648" y="843625"/>
+                  </a:lnTo>
+                  <a:lnTo>
+                    <a:pt x="829648" y="804230"/>
+                  </a:lnTo>
+                  <a:lnTo>
+                    <a:pt x="921832" y="804230"/>
+                  </a:lnTo>
+                  <a:lnTo>
+                    <a:pt x="921832" y="724134"/>
+                  </a:lnTo>
+                  <a:lnTo>
+                    <a:pt x="1198381" y="724134"/>
+                  </a:lnTo>
+                  <a:lnTo>
+                    <a:pt x="1198381" y="682959"/>
+                  </a:lnTo>
+                  <a:lnTo>
+                    <a:pt x="1382748" y="682959"/>
+                  </a:lnTo>
+                  <a:lnTo>
+                    <a:pt x="1382748" y="641825"/>
+                  </a:lnTo>
+                  <a:lnTo>
+                    <a:pt x="1474931" y="641825"/>
+                  </a:lnTo>
+                  <a:lnTo>
+                    <a:pt x="1474931" y="559985"/>
+                  </a:lnTo>
+                  <a:lnTo>
+                    <a:pt x="1843664" y="559985"/>
+                  </a:lnTo>
+                  <a:lnTo>
+                    <a:pt x="1843664" y="518140"/>
+                  </a:lnTo>
+                  <a:lnTo>
+                    <a:pt x="2120213" y="518140"/>
+                  </a:lnTo>
+                  <a:lnTo>
+                    <a:pt x="2120213" y="476354"/>
+                  </a:lnTo>
+                  <a:lnTo>
+                    <a:pt x="2304580" y="476354"/>
+                  </a:lnTo>
+                  <a:lnTo>
+                    <a:pt x="2304580" y="434449"/>
+                  </a:lnTo>
+                  <a:lnTo>
+                    <a:pt x="2396763" y="434449"/>
+                  </a:lnTo>
+                  <a:lnTo>
+                    <a:pt x="2396763" y="349565"/>
+                  </a:lnTo>
+                  <a:lnTo>
+                    <a:pt x="2857679" y="349565"/>
+                  </a:lnTo>
+                  <a:lnTo>
+                    <a:pt x="2857679" y="306170"/>
+                  </a:lnTo>
+                  <a:lnTo>
+                    <a:pt x="3134228" y="306170"/>
+                  </a:lnTo>
+                  <a:lnTo>
+                    <a:pt x="3134228" y="262931"/>
+                  </a:lnTo>
+                  <a:lnTo>
+                    <a:pt x="3410778" y="262931"/>
+                  </a:lnTo>
+                  <a:lnTo>
+                    <a:pt x="3410778" y="219773"/>
+                  </a:lnTo>
+                  <a:lnTo>
+                    <a:pt x="3963877" y="219773"/>
+                  </a:lnTo>
+                  <a:lnTo>
+                    <a:pt x="3963877" y="176576"/>
+                  </a:lnTo>
+                  <a:lnTo>
+                    <a:pt x="4424793" y="176576"/>
+                  </a:lnTo>
+                  <a:lnTo>
+                    <a:pt x="4424793" y="132765"/>
+                  </a:lnTo>
+                  <a:lnTo>
+                    <a:pt x="6913740" y="132765"/>
+                  </a:lnTo>
+                  <a:lnTo>
+                    <a:pt x="6913740" y="45222"/>
+                  </a:lnTo>
+                  <a:lnTo>
+                    <a:pt x="7005923" y="45222"/>
                   </a:lnTo>
                   <a:lnTo>
                     <a:pt x="7005923" y="0"/>
@@ -3203,131 +3203,131 @@
           <p:spPr>
             <a:xfrm>
               <a:off x="1260991" y="2861938"/>
-              <a:ext cx="7005923" cy="2521417"/>
+              <a:ext cx="7005923" cy="2519914"/>
             </a:xfrm>
             <a:custGeom>
               <a:avLst/>
               <a:pathLst>
-                <a:path w="7005923" h="2521417">
+                <a:path w="7005923" h="2519914">
                   <a:moveTo>
-                    <a:pt x="0" y="2521417"/>
+                    <a:pt x="0" y="2519914"/>
                   </a:moveTo>
                   <a:lnTo>
-                    <a:pt x="276549" y="2521417"/>
-                  </a:lnTo>
-                  <a:lnTo>
-                    <a:pt x="276549" y="2422329"/>
-                  </a:lnTo>
-                  <a:lnTo>
-                    <a:pt x="368732" y="2422329"/>
-                  </a:lnTo>
-                  <a:lnTo>
-                    <a:pt x="368732" y="2132572"/>
-                  </a:lnTo>
-                  <a:lnTo>
-                    <a:pt x="553099" y="2132572"/>
-                  </a:lnTo>
-                  <a:lnTo>
-                    <a:pt x="553099" y="1939675"/>
-                  </a:lnTo>
-                  <a:lnTo>
-                    <a:pt x="737465" y="1939675"/>
-                  </a:lnTo>
-                  <a:lnTo>
-                    <a:pt x="737465" y="1843816"/>
-                  </a:lnTo>
-                  <a:lnTo>
-                    <a:pt x="829648" y="1843816"/>
-                  </a:lnTo>
-                  <a:lnTo>
-                    <a:pt x="829648" y="1748029"/>
-                  </a:lnTo>
-                  <a:lnTo>
-                    <a:pt x="921832" y="1748029"/>
-                  </a:lnTo>
-                  <a:lnTo>
-                    <a:pt x="921832" y="1556216"/>
-                  </a:lnTo>
-                  <a:lnTo>
-                    <a:pt x="1198381" y="1556216"/>
-                  </a:lnTo>
-                  <a:lnTo>
-                    <a:pt x="1198381" y="1459081"/>
-                  </a:lnTo>
-                  <a:lnTo>
-                    <a:pt x="1382748" y="1459081"/>
-                  </a:lnTo>
-                  <a:lnTo>
-                    <a:pt x="1382748" y="1363082"/>
-                  </a:lnTo>
-                  <a:lnTo>
-                    <a:pt x="1474931" y="1363082"/>
-                  </a:lnTo>
-                  <a:lnTo>
-                    <a:pt x="1474931" y="1175222"/>
-                  </a:lnTo>
-                  <a:lnTo>
-                    <a:pt x="1843664" y="1175222"/>
-                  </a:lnTo>
-                  <a:lnTo>
-                    <a:pt x="1843664" y="1080937"/>
-                  </a:lnTo>
-                  <a:lnTo>
-                    <a:pt x="2120213" y="1080937"/>
-                  </a:lnTo>
-                  <a:lnTo>
-                    <a:pt x="2120213" y="987836"/>
-                  </a:lnTo>
-                  <a:lnTo>
-                    <a:pt x="2304580" y="987836"/>
-                  </a:lnTo>
-                  <a:lnTo>
-                    <a:pt x="2304580" y="895575"/>
-                  </a:lnTo>
-                  <a:lnTo>
-                    <a:pt x="2396763" y="895575"/>
-                  </a:lnTo>
-                  <a:lnTo>
-                    <a:pt x="2396763" y="711467"/>
-                  </a:lnTo>
-                  <a:lnTo>
-                    <a:pt x="2857679" y="711467"/>
-                  </a:lnTo>
-                  <a:lnTo>
-                    <a:pt x="2857679" y="619315"/>
-                  </a:lnTo>
-                  <a:lnTo>
-                    <a:pt x="3134228" y="619315"/>
-                  </a:lnTo>
-                  <a:lnTo>
-                    <a:pt x="3134228" y="528590"/>
-                  </a:lnTo>
-                  <a:lnTo>
-                    <a:pt x="3410778" y="528590"/>
-                  </a:lnTo>
-                  <a:lnTo>
-                    <a:pt x="3410778" y="439102"/>
-                  </a:lnTo>
-                  <a:lnTo>
-                    <a:pt x="3963877" y="439102"/>
-                  </a:lnTo>
-                  <a:lnTo>
-                    <a:pt x="3963877" y="350650"/>
-                  </a:lnTo>
-                  <a:lnTo>
-                    <a:pt x="4424793" y="350650"/>
-                  </a:lnTo>
-                  <a:lnTo>
-                    <a:pt x="4424793" y="262006"/>
-                  </a:lnTo>
-                  <a:lnTo>
-                    <a:pt x="6913740" y="262006"/>
-                  </a:lnTo>
-                  <a:lnTo>
-                    <a:pt x="6913740" y="88096"/>
-                  </a:lnTo>
-                  <a:lnTo>
-                    <a:pt x="7005923" y="88096"/>
+                    <a:pt x="276549" y="2519914"/>
+                  </a:lnTo>
+                  <a:lnTo>
+                    <a:pt x="276549" y="2420377"/>
+                  </a:lnTo>
+                  <a:lnTo>
+                    <a:pt x="368732" y="2420377"/>
+                  </a:lnTo>
+                  <a:lnTo>
+                    <a:pt x="368732" y="2129165"/>
+                  </a:lnTo>
+                  <a:lnTo>
+                    <a:pt x="553099" y="2129165"/>
+                  </a:lnTo>
+                  <a:lnTo>
+                    <a:pt x="553099" y="1936417"/>
+                  </a:lnTo>
+                  <a:lnTo>
+                    <a:pt x="737465" y="1936417"/>
+                  </a:lnTo>
+                  <a:lnTo>
+                    <a:pt x="737465" y="1840563"/>
+                  </a:lnTo>
+                  <a:lnTo>
+                    <a:pt x="829648" y="1840563"/>
+                  </a:lnTo>
+                  <a:lnTo>
+                    <a:pt x="829648" y="1744917"/>
+                  </a:lnTo>
+                  <a:lnTo>
+                    <a:pt x="921832" y="1744917"/>
+                  </a:lnTo>
+                  <a:lnTo>
+                    <a:pt x="921832" y="1553492"/>
+                  </a:lnTo>
+                  <a:lnTo>
+                    <a:pt x="1198381" y="1553492"/>
+                  </a:lnTo>
+                  <a:lnTo>
+                    <a:pt x="1198381" y="1456657"/>
+                  </a:lnTo>
+                  <a:lnTo>
+                    <a:pt x="1382748" y="1456657"/>
+                  </a:lnTo>
+                  <a:lnTo>
+                    <a:pt x="1382748" y="1360974"/>
+                  </a:lnTo>
+                  <a:lnTo>
+                    <a:pt x="1474931" y="1360974"/>
+                  </a:lnTo>
+                  <a:lnTo>
+                    <a:pt x="1474931" y="1173724"/>
+                  </a:lnTo>
+                  <a:lnTo>
+                    <a:pt x="1843664" y="1173724"/>
+                  </a:lnTo>
+                  <a:lnTo>
+                    <a:pt x="1843664" y="1079573"/>
+                  </a:lnTo>
+                  <a:lnTo>
+                    <a:pt x="2120213" y="1079573"/>
+                  </a:lnTo>
+                  <a:lnTo>
+                    <a:pt x="2120213" y="986617"/>
+                  </a:lnTo>
+                  <a:lnTo>
+                    <a:pt x="2304580" y="986617"/>
+                  </a:lnTo>
+                  <a:lnTo>
+                    <a:pt x="2304580" y="894459"/>
+                  </a:lnTo>
+                  <a:lnTo>
+                    <a:pt x="2396763" y="894459"/>
+                  </a:lnTo>
+                  <a:lnTo>
+                    <a:pt x="2396763" y="711010"/>
+                  </a:lnTo>
+                  <a:lnTo>
+                    <a:pt x="2857679" y="711010"/>
+                  </a:lnTo>
+                  <a:lnTo>
+                    <a:pt x="2857679" y="618882"/>
+                  </a:lnTo>
+                  <a:lnTo>
+                    <a:pt x="3134228" y="618882"/>
+                  </a:lnTo>
+                  <a:lnTo>
+                    <a:pt x="3134228" y="528190"/>
+                  </a:lnTo>
+                  <a:lnTo>
+                    <a:pt x="3410778" y="528190"/>
+                  </a:lnTo>
+                  <a:lnTo>
+                    <a:pt x="3410778" y="438757"/>
+                  </a:lnTo>
+                  <a:lnTo>
+                    <a:pt x="3963877" y="438757"/>
+                  </a:lnTo>
+                  <a:lnTo>
+                    <a:pt x="3963877" y="350330"/>
+                  </a:lnTo>
+                  <a:lnTo>
+                    <a:pt x="4424793" y="350330"/>
+                  </a:lnTo>
+                  <a:lnTo>
+                    <a:pt x="4424793" y="261748"/>
+                  </a:lnTo>
+                  <a:lnTo>
+                    <a:pt x="6913740" y="261748"/>
+                  </a:lnTo>
+                  <a:lnTo>
+                    <a:pt x="6913740" y="88034"/>
+                  </a:lnTo>
+                  <a:lnTo>
+                    <a:pt x="7005923" y="88034"/>
                   </a:lnTo>
                   <a:lnTo>
                     <a:pt x="7005923" y="0"/>
@@ -3405,7 +3405,7 @@
           </p:nvSpPr>
           <p:spPr>
             <a:xfrm>
-              <a:off x="692708" y="4811319"/>
+              <a:off x="692708" y="4819287"/>
               <a:ext cx="155356" cy="80101"/>
             </a:xfrm>
             <a:prstGeom prst="rect">
@@ -3451,7 +3451,7 @@
           </p:nvSpPr>
           <p:spPr>
             <a:xfrm>
-              <a:off x="692708" y="4082267"/>
+              <a:off x="692708" y="4098203"/>
               <a:ext cx="155356" cy="80101"/>
             </a:xfrm>
             <a:prstGeom prst="rect">
@@ -3497,7 +3497,7 @@
           </p:nvSpPr>
           <p:spPr>
             <a:xfrm>
-              <a:off x="692708" y="3353214"/>
+              <a:off x="692708" y="3377118"/>
               <a:ext cx="155356" cy="80101"/>
             </a:xfrm>
             <a:prstGeom prst="rect">
@@ -3543,7 +3543,7 @@
           </p:nvSpPr>
           <p:spPr>
             <a:xfrm>
-              <a:off x="692708" y="2624162"/>
+              <a:off x="692708" y="2656034"/>
               <a:ext cx="155356" cy="80101"/>
             </a:xfrm>
             <a:prstGeom prst="rect">
@@ -4116,7 +4116,7 @@
                   <a:latin typeface="Helvetica"/>
                   <a:cs typeface="Helvetica"/>
                 </a:rPr>
-                <a:t>Discrep &gt;= +25 vs &lt;+25: subHR = 2.60 (95% CI 1.22-5.58), p = 0.014</a:t>
+                <a:t>Discrep &gt;= +25 vs &lt;+25: subHR = 2.67 (95% CI 1.23-5.77), p = 0.013</a:t>
               </a:r>
             </a:p>
           </p:txBody>

--- a/docs/plots/carbo/jx_carbo_adjcif_anyhosp.pptx
+++ b/docs/plots/carbo/jx_carbo_adjcif_anyhosp.pptx
@@ -2271,7 +2271,7 @@
           </p:nvSpPr>
           <p:spPr>
             <a:xfrm>
-              <a:off x="910695" y="5219880"/>
+              <a:off x="910695" y="5215896"/>
               <a:ext cx="7706515" cy="0"/>
             </a:xfrm>
             <a:custGeom>
@@ -2314,7 +2314,7 @@
           </p:nvSpPr>
           <p:spPr>
             <a:xfrm>
-              <a:off x="910695" y="4498795"/>
+              <a:off x="910695" y="4486843"/>
               <a:ext cx="7706515" cy="0"/>
             </a:xfrm>
             <a:custGeom>
@@ -2357,7 +2357,7 @@
           </p:nvSpPr>
           <p:spPr>
             <a:xfrm>
-              <a:off x="910695" y="3777711"/>
+              <a:off x="910695" y="3757791"/>
               <a:ext cx="7706515" cy="0"/>
             </a:xfrm>
             <a:custGeom>
@@ -2400,7 +2400,7 @@
           </p:nvSpPr>
           <p:spPr>
             <a:xfrm>
-              <a:off x="910695" y="3056627"/>
+              <a:off x="910695" y="3028739"/>
               <a:ext cx="7706515" cy="0"/>
             </a:xfrm>
             <a:custGeom>
@@ -2658,7 +2658,7 @@
           </p:nvSpPr>
           <p:spPr>
             <a:xfrm>
-              <a:off x="910695" y="4859338"/>
+              <a:off x="910695" y="4851370"/>
               <a:ext cx="7706515" cy="0"/>
             </a:xfrm>
             <a:custGeom>
@@ -2701,7 +2701,7 @@
           </p:nvSpPr>
           <p:spPr>
             <a:xfrm>
-              <a:off x="910695" y="4138253"/>
+              <a:off x="910695" y="4122317"/>
               <a:ext cx="7706515" cy="0"/>
             </a:xfrm>
             <a:custGeom>
@@ -2744,7 +2744,7 @@
           </p:nvSpPr>
           <p:spPr>
             <a:xfrm>
-              <a:off x="910695" y="3417169"/>
+              <a:off x="910695" y="3393265"/>
               <a:ext cx="7706515" cy="0"/>
             </a:xfrm>
             <a:custGeom>
@@ -2787,7 +2787,7 @@
           </p:nvSpPr>
           <p:spPr>
             <a:xfrm>
-              <a:off x="910695" y="2696085"/>
+              <a:off x="910695" y="2664213"/>
               <a:ext cx="7706515" cy="0"/>
             </a:xfrm>
             <a:custGeom>
@@ -3045,132 +3045,132 @@
           </p:nvSpPr>
           <p:spPr>
             <a:xfrm>
-              <a:off x="1260991" y="4392822"/>
-              <a:ext cx="7005923" cy="1112407"/>
+              <a:off x="1260991" y="4368116"/>
+              <a:ext cx="7005923" cy="1135911"/>
             </a:xfrm>
             <a:custGeom>
               <a:avLst/>
               <a:pathLst>
-                <a:path w="7005923" h="1112407">
+                <a:path w="7005923" h="1135911">
                   <a:moveTo>
-                    <a:pt x="0" y="1112407"/>
+                    <a:pt x="0" y="1135911"/>
                   </a:moveTo>
                   <a:lnTo>
-                    <a:pt x="276549" y="1112407"/>
-                  </a:lnTo>
-                  <a:lnTo>
-                    <a:pt x="276549" y="1074168"/>
-                  </a:lnTo>
-                  <a:lnTo>
-                    <a:pt x="368732" y="1074168"/>
-                  </a:lnTo>
-                  <a:lnTo>
-                    <a:pt x="368732" y="960096"/>
-                  </a:lnTo>
-                  <a:lnTo>
-                    <a:pt x="553099" y="960096"/>
-                  </a:lnTo>
-                  <a:lnTo>
-                    <a:pt x="553099" y="882702"/>
-                  </a:lnTo>
-                  <a:lnTo>
-                    <a:pt x="737465" y="882702"/>
-                  </a:lnTo>
-                  <a:lnTo>
-                    <a:pt x="737465" y="843625"/>
-                  </a:lnTo>
-                  <a:lnTo>
-                    <a:pt x="829648" y="843625"/>
-                  </a:lnTo>
-                  <a:lnTo>
-                    <a:pt x="829648" y="804230"/>
-                  </a:lnTo>
-                  <a:lnTo>
-                    <a:pt x="921832" y="804230"/>
-                  </a:lnTo>
-                  <a:lnTo>
-                    <a:pt x="921832" y="724134"/>
-                  </a:lnTo>
-                  <a:lnTo>
-                    <a:pt x="1198381" y="724134"/>
-                  </a:lnTo>
-                  <a:lnTo>
-                    <a:pt x="1198381" y="682959"/>
-                  </a:lnTo>
-                  <a:lnTo>
-                    <a:pt x="1382748" y="682959"/>
-                  </a:lnTo>
-                  <a:lnTo>
-                    <a:pt x="1382748" y="641825"/>
-                  </a:lnTo>
-                  <a:lnTo>
-                    <a:pt x="1474931" y="641825"/>
-                  </a:lnTo>
-                  <a:lnTo>
-                    <a:pt x="1474931" y="559985"/>
-                  </a:lnTo>
-                  <a:lnTo>
-                    <a:pt x="1843664" y="559985"/>
-                  </a:lnTo>
-                  <a:lnTo>
-                    <a:pt x="1843664" y="518140"/>
-                  </a:lnTo>
-                  <a:lnTo>
-                    <a:pt x="2120213" y="518140"/>
-                  </a:lnTo>
-                  <a:lnTo>
-                    <a:pt x="2120213" y="476354"/>
-                  </a:lnTo>
-                  <a:lnTo>
-                    <a:pt x="2304580" y="476354"/>
-                  </a:lnTo>
-                  <a:lnTo>
-                    <a:pt x="2304580" y="434449"/>
-                  </a:lnTo>
-                  <a:lnTo>
-                    <a:pt x="2396763" y="434449"/>
-                  </a:lnTo>
-                  <a:lnTo>
-                    <a:pt x="2396763" y="349565"/>
-                  </a:lnTo>
-                  <a:lnTo>
-                    <a:pt x="2857679" y="349565"/>
-                  </a:lnTo>
-                  <a:lnTo>
-                    <a:pt x="2857679" y="306170"/>
-                  </a:lnTo>
-                  <a:lnTo>
-                    <a:pt x="3134228" y="306170"/>
-                  </a:lnTo>
-                  <a:lnTo>
-                    <a:pt x="3134228" y="262931"/>
-                  </a:lnTo>
-                  <a:lnTo>
-                    <a:pt x="3410778" y="262931"/>
-                  </a:lnTo>
-                  <a:lnTo>
-                    <a:pt x="3410778" y="219773"/>
-                  </a:lnTo>
-                  <a:lnTo>
-                    <a:pt x="3963877" y="219773"/>
-                  </a:lnTo>
-                  <a:lnTo>
-                    <a:pt x="3963877" y="176576"/>
-                  </a:lnTo>
-                  <a:lnTo>
-                    <a:pt x="4424793" y="176576"/>
-                  </a:lnTo>
-                  <a:lnTo>
-                    <a:pt x="4424793" y="132765"/>
-                  </a:lnTo>
-                  <a:lnTo>
-                    <a:pt x="6913740" y="132765"/>
-                  </a:lnTo>
-                  <a:lnTo>
-                    <a:pt x="6913740" y="45222"/>
-                  </a:lnTo>
-                  <a:lnTo>
-                    <a:pt x="7005923" y="45222"/>
+                    <a:pt x="276549" y="1135911"/>
+                  </a:lnTo>
+                  <a:lnTo>
+                    <a:pt x="276549" y="1096955"/>
+                  </a:lnTo>
+                  <a:lnTo>
+                    <a:pt x="368732" y="1096955"/>
+                  </a:lnTo>
+                  <a:lnTo>
+                    <a:pt x="368732" y="980848"/>
+                  </a:lnTo>
+                  <a:lnTo>
+                    <a:pt x="553099" y="980848"/>
+                  </a:lnTo>
+                  <a:lnTo>
+                    <a:pt x="553099" y="901658"/>
+                  </a:lnTo>
+                  <a:lnTo>
+                    <a:pt x="737465" y="901658"/>
+                  </a:lnTo>
+                  <a:lnTo>
+                    <a:pt x="737465" y="861715"/>
+                  </a:lnTo>
+                  <a:lnTo>
+                    <a:pt x="829648" y="861715"/>
+                  </a:lnTo>
+                  <a:lnTo>
+                    <a:pt x="829648" y="821397"/>
+                  </a:lnTo>
+                  <a:lnTo>
+                    <a:pt x="921832" y="821397"/>
+                  </a:lnTo>
+                  <a:lnTo>
+                    <a:pt x="921832" y="739403"/>
+                  </a:lnTo>
+                  <a:lnTo>
+                    <a:pt x="1198381" y="739403"/>
+                  </a:lnTo>
+                  <a:lnTo>
+                    <a:pt x="1198381" y="697219"/>
+                  </a:lnTo>
+                  <a:lnTo>
+                    <a:pt x="1382748" y="697219"/>
+                  </a:lnTo>
+                  <a:lnTo>
+                    <a:pt x="1382748" y="655076"/>
+                  </a:lnTo>
+                  <a:lnTo>
+                    <a:pt x="1474931" y="655076"/>
+                  </a:lnTo>
+                  <a:lnTo>
+                    <a:pt x="1474931" y="571260"/>
+                  </a:lnTo>
+                  <a:lnTo>
+                    <a:pt x="1843664" y="571260"/>
+                  </a:lnTo>
+                  <a:lnTo>
+                    <a:pt x="1843664" y="528497"/>
+                  </a:lnTo>
+                  <a:lnTo>
+                    <a:pt x="2120213" y="528497"/>
+                  </a:lnTo>
+                  <a:lnTo>
+                    <a:pt x="2120213" y="485797"/>
+                  </a:lnTo>
+                  <a:lnTo>
+                    <a:pt x="2304580" y="485797"/>
+                  </a:lnTo>
+                  <a:lnTo>
+                    <a:pt x="2304580" y="443006"/>
+                  </a:lnTo>
+                  <a:lnTo>
+                    <a:pt x="2396763" y="443006"/>
+                  </a:lnTo>
+                  <a:lnTo>
+                    <a:pt x="2396763" y="356144"/>
+                  </a:lnTo>
+                  <a:lnTo>
+                    <a:pt x="2857679" y="356144"/>
+                  </a:lnTo>
+                  <a:lnTo>
+                    <a:pt x="2857679" y="311903"/>
+                  </a:lnTo>
+                  <a:lnTo>
+                    <a:pt x="3134228" y="311903"/>
+                  </a:lnTo>
+                  <a:lnTo>
+                    <a:pt x="3134228" y="267829"/>
+                  </a:lnTo>
+                  <a:lnTo>
+                    <a:pt x="3410778" y="267829"/>
+                  </a:lnTo>
+                  <a:lnTo>
+                    <a:pt x="3410778" y="223838"/>
+                  </a:lnTo>
+                  <a:lnTo>
+                    <a:pt x="3963877" y="223838"/>
+                  </a:lnTo>
+                  <a:lnTo>
+                    <a:pt x="3963877" y="179836"/>
+                  </a:lnTo>
+                  <a:lnTo>
+                    <a:pt x="4424793" y="179836"/>
+                  </a:lnTo>
+                  <a:lnTo>
+                    <a:pt x="4424793" y="135204"/>
+                  </a:lnTo>
+                  <a:lnTo>
+                    <a:pt x="6913740" y="135204"/>
+                  </a:lnTo>
+                  <a:lnTo>
+                    <a:pt x="6913740" y="46025"/>
+                  </a:lnTo>
+                  <a:lnTo>
+                    <a:pt x="7005923" y="46025"/>
                   </a:lnTo>
                   <a:lnTo>
                     <a:pt x="7005923" y="0"/>
@@ -3203,131 +3203,131 @@
           <p:spPr>
             <a:xfrm>
               <a:off x="1260991" y="2861938"/>
-              <a:ext cx="7005923" cy="2519914"/>
+              <a:ext cx="7005923" cy="2521417"/>
             </a:xfrm>
             <a:custGeom>
               <a:avLst/>
               <a:pathLst>
-                <a:path w="7005923" h="2519914">
+                <a:path w="7005923" h="2521417">
                   <a:moveTo>
-                    <a:pt x="0" y="2519914"/>
+                    <a:pt x="0" y="2521417"/>
                   </a:moveTo>
                   <a:lnTo>
-                    <a:pt x="276549" y="2519914"/>
-                  </a:lnTo>
-                  <a:lnTo>
-                    <a:pt x="276549" y="2420377"/>
-                  </a:lnTo>
-                  <a:lnTo>
-                    <a:pt x="368732" y="2420377"/>
-                  </a:lnTo>
-                  <a:lnTo>
-                    <a:pt x="368732" y="2129165"/>
-                  </a:lnTo>
-                  <a:lnTo>
-                    <a:pt x="553099" y="2129165"/>
-                  </a:lnTo>
-                  <a:lnTo>
-                    <a:pt x="553099" y="1936417"/>
-                  </a:lnTo>
-                  <a:lnTo>
-                    <a:pt x="737465" y="1936417"/>
-                  </a:lnTo>
-                  <a:lnTo>
-                    <a:pt x="737465" y="1840563"/>
-                  </a:lnTo>
-                  <a:lnTo>
-                    <a:pt x="829648" y="1840563"/>
-                  </a:lnTo>
-                  <a:lnTo>
-                    <a:pt x="829648" y="1744917"/>
-                  </a:lnTo>
-                  <a:lnTo>
-                    <a:pt x="921832" y="1744917"/>
-                  </a:lnTo>
-                  <a:lnTo>
-                    <a:pt x="921832" y="1553492"/>
-                  </a:lnTo>
-                  <a:lnTo>
-                    <a:pt x="1198381" y="1553492"/>
-                  </a:lnTo>
-                  <a:lnTo>
-                    <a:pt x="1198381" y="1456657"/>
-                  </a:lnTo>
-                  <a:lnTo>
-                    <a:pt x="1382748" y="1456657"/>
-                  </a:lnTo>
-                  <a:lnTo>
-                    <a:pt x="1382748" y="1360974"/>
-                  </a:lnTo>
-                  <a:lnTo>
-                    <a:pt x="1474931" y="1360974"/>
-                  </a:lnTo>
-                  <a:lnTo>
-                    <a:pt x="1474931" y="1173724"/>
-                  </a:lnTo>
-                  <a:lnTo>
-                    <a:pt x="1843664" y="1173724"/>
-                  </a:lnTo>
-                  <a:lnTo>
-                    <a:pt x="1843664" y="1079573"/>
-                  </a:lnTo>
-                  <a:lnTo>
-                    <a:pt x="2120213" y="1079573"/>
-                  </a:lnTo>
-                  <a:lnTo>
-                    <a:pt x="2120213" y="986617"/>
-                  </a:lnTo>
-                  <a:lnTo>
-                    <a:pt x="2304580" y="986617"/>
-                  </a:lnTo>
-                  <a:lnTo>
-                    <a:pt x="2304580" y="894459"/>
-                  </a:lnTo>
-                  <a:lnTo>
-                    <a:pt x="2396763" y="894459"/>
-                  </a:lnTo>
-                  <a:lnTo>
-                    <a:pt x="2396763" y="711010"/>
-                  </a:lnTo>
-                  <a:lnTo>
-                    <a:pt x="2857679" y="711010"/>
-                  </a:lnTo>
-                  <a:lnTo>
-                    <a:pt x="2857679" y="618882"/>
-                  </a:lnTo>
-                  <a:lnTo>
-                    <a:pt x="3134228" y="618882"/>
-                  </a:lnTo>
-                  <a:lnTo>
-                    <a:pt x="3134228" y="528190"/>
-                  </a:lnTo>
-                  <a:lnTo>
-                    <a:pt x="3410778" y="528190"/>
-                  </a:lnTo>
-                  <a:lnTo>
-                    <a:pt x="3410778" y="438757"/>
-                  </a:lnTo>
-                  <a:lnTo>
-                    <a:pt x="3963877" y="438757"/>
-                  </a:lnTo>
-                  <a:lnTo>
-                    <a:pt x="3963877" y="350330"/>
-                  </a:lnTo>
-                  <a:lnTo>
-                    <a:pt x="4424793" y="350330"/>
-                  </a:lnTo>
-                  <a:lnTo>
-                    <a:pt x="4424793" y="261748"/>
-                  </a:lnTo>
-                  <a:lnTo>
-                    <a:pt x="6913740" y="261748"/>
-                  </a:lnTo>
-                  <a:lnTo>
-                    <a:pt x="6913740" y="88034"/>
-                  </a:lnTo>
-                  <a:lnTo>
-                    <a:pt x="7005923" y="88034"/>
+                    <a:pt x="276549" y="2521417"/>
+                  </a:lnTo>
+                  <a:lnTo>
+                    <a:pt x="276549" y="2422329"/>
+                  </a:lnTo>
+                  <a:lnTo>
+                    <a:pt x="368732" y="2422329"/>
+                  </a:lnTo>
+                  <a:lnTo>
+                    <a:pt x="368732" y="2132572"/>
+                  </a:lnTo>
+                  <a:lnTo>
+                    <a:pt x="553099" y="2132572"/>
+                  </a:lnTo>
+                  <a:lnTo>
+                    <a:pt x="553099" y="1939675"/>
+                  </a:lnTo>
+                  <a:lnTo>
+                    <a:pt x="737465" y="1939675"/>
+                  </a:lnTo>
+                  <a:lnTo>
+                    <a:pt x="737465" y="1843816"/>
+                  </a:lnTo>
+                  <a:lnTo>
+                    <a:pt x="829648" y="1843816"/>
+                  </a:lnTo>
+                  <a:lnTo>
+                    <a:pt x="829648" y="1748029"/>
+                  </a:lnTo>
+                  <a:lnTo>
+                    <a:pt x="921832" y="1748029"/>
+                  </a:lnTo>
+                  <a:lnTo>
+                    <a:pt x="921832" y="1556216"/>
+                  </a:lnTo>
+                  <a:lnTo>
+                    <a:pt x="1198381" y="1556216"/>
+                  </a:lnTo>
+                  <a:lnTo>
+                    <a:pt x="1198381" y="1459081"/>
+                  </a:lnTo>
+                  <a:lnTo>
+                    <a:pt x="1382748" y="1459081"/>
+                  </a:lnTo>
+                  <a:lnTo>
+                    <a:pt x="1382748" y="1363082"/>
+                  </a:lnTo>
+                  <a:lnTo>
+                    <a:pt x="1474931" y="1363082"/>
+                  </a:lnTo>
+                  <a:lnTo>
+                    <a:pt x="1474931" y="1175222"/>
+                  </a:lnTo>
+                  <a:lnTo>
+                    <a:pt x="1843664" y="1175222"/>
+                  </a:lnTo>
+                  <a:lnTo>
+                    <a:pt x="1843664" y="1080937"/>
+                  </a:lnTo>
+                  <a:lnTo>
+                    <a:pt x="2120213" y="1080937"/>
+                  </a:lnTo>
+                  <a:lnTo>
+                    <a:pt x="2120213" y="987836"/>
+                  </a:lnTo>
+                  <a:lnTo>
+                    <a:pt x="2304580" y="987836"/>
+                  </a:lnTo>
+                  <a:lnTo>
+                    <a:pt x="2304580" y="895575"/>
+                  </a:lnTo>
+                  <a:lnTo>
+                    <a:pt x="2396763" y="895575"/>
+                  </a:lnTo>
+                  <a:lnTo>
+                    <a:pt x="2396763" y="711467"/>
+                  </a:lnTo>
+                  <a:lnTo>
+                    <a:pt x="2857679" y="711467"/>
+                  </a:lnTo>
+                  <a:lnTo>
+                    <a:pt x="2857679" y="619315"/>
+                  </a:lnTo>
+                  <a:lnTo>
+                    <a:pt x="3134228" y="619315"/>
+                  </a:lnTo>
+                  <a:lnTo>
+                    <a:pt x="3134228" y="528590"/>
+                  </a:lnTo>
+                  <a:lnTo>
+                    <a:pt x="3410778" y="528590"/>
+                  </a:lnTo>
+                  <a:lnTo>
+                    <a:pt x="3410778" y="439102"/>
+                  </a:lnTo>
+                  <a:lnTo>
+                    <a:pt x="3963877" y="439102"/>
+                  </a:lnTo>
+                  <a:lnTo>
+                    <a:pt x="3963877" y="350650"/>
+                  </a:lnTo>
+                  <a:lnTo>
+                    <a:pt x="4424793" y="350650"/>
+                  </a:lnTo>
+                  <a:lnTo>
+                    <a:pt x="4424793" y="262006"/>
+                  </a:lnTo>
+                  <a:lnTo>
+                    <a:pt x="6913740" y="262006"/>
+                  </a:lnTo>
+                  <a:lnTo>
+                    <a:pt x="6913740" y="88096"/>
+                  </a:lnTo>
+                  <a:lnTo>
+                    <a:pt x="7005923" y="88096"/>
                   </a:lnTo>
                   <a:lnTo>
                     <a:pt x="7005923" y="0"/>
@@ -3405,7 +3405,7 @@
           </p:nvSpPr>
           <p:spPr>
             <a:xfrm>
-              <a:off x="692708" y="4819287"/>
+              <a:off x="692708" y="4811319"/>
               <a:ext cx="155356" cy="80101"/>
             </a:xfrm>
             <a:prstGeom prst="rect">
@@ -3451,7 +3451,7 @@
           </p:nvSpPr>
           <p:spPr>
             <a:xfrm>
-              <a:off x="692708" y="4098203"/>
+              <a:off x="692708" y="4082267"/>
               <a:ext cx="155356" cy="80101"/>
             </a:xfrm>
             <a:prstGeom prst="rect">
@@ -3497,7 +3497,7 @@
           </p:nvSpPr>
           <p:spPr>
             <a:xfrm>
-              <a:off x="692708" y="3377118"/>
+              <a:off x="692708" y="3353214"/>
               <a:ext cx="155356" cy="80101"/>
             </a:xfrm>
             <a:prstGeom prst="rect">
@@ -3543,7 +3543,7 @@
           </p:nvSpPr>
           <p:spPr>
             <a:xfrm>
-              <a:off x="692708" y="2656034"/>
+              <a:off x="692708" y="2624162"/>
               <a:ext cx="155356" cy="80101"/>
             </a:xfrm>
             <a:prstGeom prst="rect">
@@ -4116,7 +4116,7 @@
                   <a:latin typeface="Helvetica"/>
                   <a:cs typeface="Helvetica"/>
                 </a:rPr>
-                <a:t>Discrep &gt;= +25 vs &lt;+25: subHR = 2.67 (95% CI 1.23-5.77), p = 0.013</a:t>
+                <a:t>Discrep &gt;= +25 vs &lt;+25: subHR = 2.60 (95% CI 1.22-5.58), p = 0.014</a:t>
               </a:r>
             </a:p>
           </p:txBody>

--- a/docs/plots/carbo/jx_carbo_adjcif_anyhosp.pptx
+++ b/docs/plots/carbo/jx_carbo_adjcif_anyhosp.pptx
@@ -2658,7 +2658,7 @@
           </p:nvSpPr>
           <p:spPr>
             <a:xfrm>
-              <a:off x="910695" y="4851370"/>
+              <a:off x="910695" y="4851369"/>
               <a:ext cx="7706515" cy="0"/>
             </a:xfrm>
             <a:custGeom>
@@ -3131,10 +3131,10 @@
                     <a:pt x="2396763" y="443006"/>
                   </a:lnTo>
                   <a:lnTo>
-                    <a:pt x="2396763" y="356144"/>
-                  </a:lnTo>
-                  <a:lnTo>
-                    <a:pt x="2857679" y="356144"/>
+                    <a:pt x="2396763" y="356145"/>
+                  </a:lnTo>
+                  <a:lnTo>
+                    <a:pt x="2857679" y="356145"/>
                   </a:lnTo>
                   <a:lnTo>
                     <a:pt x="2857679" y="311903"/>
@@ -3451,7 +3451,7 @@
           </p:nvSpPr>
           <p:spPr>
             <a:xfrm>
-              <a:off x="692708" y="4082267"/>
+              <a:off x="692708" y="4082266"/>
               <a:ext cx="155356" cy="80101"/>
             </a:xfrm>
             <a:prstGeom prst="rect">

--- a/docs/plots/carbo/jx_carbo_adjcif_anyhosp.pptx
+++ b/docs/plots/carbo/jx_carbo_adjcif_anyhosp.pptx
@@ -2271,26 +2271,26 @@
           </p:nvSpPr>
           <p:spPr>
             <a:xfrm>
-              <a:off x="910695" y="5215896"/>
-              <a:ext cx="7706515" cy="0"/>
+              <a:off x="1034151" y="5156054"/>
+              <a:ext cx="7564080" cy="0"/>
             </a:xfrm>
             <a:custGeom>
               <a:avLst/>
               <a:pathLst>
-                <a:path w="7706515" h="0">
+                <a:path w="7564080" h="0">
                   <a:moveTo>
                     <a:pt x="0" y="0"/>
                   </a:moveTo>
                   <a:lnTo>
-                    <a:pt x="7706515" y="0"/>
-                  </a:lnTo>
-                  <a:lnTo>
-                    <a:pt x="7706515" y="0"/>
+                    <a:pt x="7564080" y="0"/>
+                  </a:lnTo>
+                  <a:lnTo>
+                    <a:pt x="7564080" y="0"/>
                   </a:lnTo>
                 </a:path>
               </a:pathLst>
             </a:custGeom>
-            <a:ln w="6775" cap="flat">
+            <a:ln w="8623" cap="flat">
               <a:solidFill>
                 <a:srgbClr val="EBEBEB">
                   <a:alpha val="100000"/>
@@ -2314,26 +2314,26 @@
           </p:nvSpPr>
           <p:spPr>
             <a:xfrm>
-              <a:off x="910695" y="4486843"/>
-              <a:ext cx="7706515" cy="0"/>
+              <a:off x="1034151" y="4498850"/>
+              <a:ext cx="7564080" cy="0"/>
             </a:xfrm>
             <a:custGeom>
               <a:avLst/>
               <a:pathLst>
-                <a:path w="7706515" h="0">
+                <a:path w="7564080" h="0">
                   <a:moveTo>
                     <a:pt x="0" y="0"/>
                   </a:moveTo>
                   <a:lnTo>
-                    <a:pt x="7706515" y="0"/>
-                  </a:lnTo>
-                  <a:lnTo>
-                    <a:pt x="7706515" y="0"/>
+                    <a:pt x="7564080" y="0"/>
+                  </a:lnTo>
+                  <a:lnTo>
+                    <a:pt x="7564080" y="0"/>
                   </a:lnTo>
                 </a:path>
               </a:pathLst>
             </a:custGeom>
-            <a:ln w="6775" cap="flat">
+            <a:ln w="8623" cap="flat">
               <a:solidFill>
                 <a:srgbClr val="EBEBEB">
                   <a:alpha val="100000"/>
@@ -2357,26 +2357,26 @@
           </p:nvSpPr>
           <p:spPr>
             <a:xfrm>
-              <a:off x="910695" y="3757791"/>
-              <a:ext cx="7706515" cy="0"/>
+              <a:off x="1034151" y="3841646"/>
+              <a:ext cx="7564080" cy="0"/>
             </a:xfrm>
             <a:custGeom>
               <a:avLst/>
               <a:pathLst>
-                <a:path w="7706515" h="0">
+                <a:path w="7564080" h="0">
                   <a:moveTo>
                     <a:pt x="0" y="0"/>
                   </a:moveTo>
                   <a:lnTo>
-                    <a:pt x="7706515" y="0"/>
-                  </a:lnTo>
-                  <a:lnTo>
-                    <a:pt x="7706515" y="0"/>
+                    <a:pt x="7564080" y="0"/>
+                  </a:lnTo>
+                  <a:lnTo>
+                    <a:pt x="7564080" y="0"/>
                   </a:lnTo>
                 </a:path>
               </a:pathLst>
             </a:custGeom>
-            <a:ln w="6775" cap="flat">
+            <a:ln w="8623" cap="flat">
               <a:solidFill>
                 <a:srgbClr val="EBEBEB">
                   <a:alpha val="100000"/>
@@ -2400,26 +2400,26 @@
           </p:nvSpPr>
           <p:spPr>
             <a:xfrm>
-              <a:off x="910695" y="3028739"/>
-              <a:ext cx="7706515" cy="0"/>
+              <a:off x="1034151" y="3184443"/>
+              <a:ext cx="7564080" cy="0"/>
             </a:xfrm>
             <a:custGeom>
               <a:avLst/>
               <a:pathLst>
-                <a:path w="7706515" h="0">
+                <a:path w="7564080" h="0">
                   <a:moveTo>
                     <a:pt x="0" y="0"/>
                   </a:moveTo>
                   <a:lnTo>
-                    <a:pt x="7706515" y="0"/>
-                  </a:lnTo>
-                  <a:lnTo>
-                    <a:pt x="7706515" y="0"/>
+                    <a:pt x="7564080" y="0"/>
+                  </a:lnTo>
+                  <a:lnTo>
+                    <a:pt x="7564080" y="0"/>
                   </a:lnTo>
                 </a:path>
               </a:pathLst>
             </a:custGeom>
-            <a:ln w="6775" cap="flat">
+            <a:ln w="8623" cap="flat">
               <a:solidFill>
                 <a:srgbClr val="EBEBEB">
                   <a:alpha val="100000"/>
@@ -2443,15 +2443,15 @@
           </p:nvSpPr>
           <p:spPr>
             <a:xfrm>
-              <a:off x="1906273" y="2583293"/>
-              <a:ext cx="0" cy="3139848"/>
+              <a:off x="2011329" y="2782896"/>
+              <a:ext cx="0" cy="2830414"/>
             </a:xfrm>
             <a:custGeom>
               <a:avLst/>
               <a:pathLst>
-                <a:path w="0" h="3139848">
+                <a:path w="0" h="2830414">
                   <a:moveTo>
-                    <a:pt x="0" y="3139848"/>
+                    <a:pt x="0" y="2830414"/>
                   </a:moveTo>
                   <a:lnTo>
                     <a:pt x="0" y="0"/>
@@ -2462,7 +2462,7 @@
                 </a:path>
               </a:pathLst>
             </a:custGeom>
-            <a:ln w="6775" cap="flat">
+            <a:ln w="8623" cap="flat">
               <a:solidFill>
                 <a:srgbClr val="EBEBEB">
                   <a:alpha val="100000"/>
@@ -2486,15 +2486,15 @@
           </p:nvSpPr>
           <p:spPr>
             <a:xfrm>
-              <a:off x="3749937" y="2583293"/>
-              <a:ext cx="0" cy="3139848"/>
+              <a:off x="3820917" y="2782896"/>
+              <a:ext cx="0" cy="2830414"/>
             </a:xfrm>
             <a:custGeom>
               <a:avLst/>
               <a:pathLst>
-                <a:path w="0" h="3139848">
+                <a:path w="0" h="2830414">
                   <a:moveTo>
-                    <a:pt x="0" y="3139848"/>
+                    <a:pt x="0" y="2830414"/>
                   </a:moveTo>
                   <a:lnTo>
                     <a:pt x="0" y="0"/>
@@ -2505,7 +2505,7 @@
                 </a:path>
               </a:pathLst>
             </a:custGeom>
-            <a:ln w="6775" cap="flat">
+            <a:ln w="8623" cap="flat">
               <a:solidFill>
                 <a:srgbClr val="EBEBEB">
                   <a:alpha val="100000"/>
@@ -2529,15 +2529,15 @@
           </p:nvSpPr>
           <p:spPr>
             <a:xfrm>
-              <a:off x="5593601" y="2583293"/>
-              <a:ext cx="0" cy="3139848"/>
+              <a:off x="5630506" y="2782896"/>
+              <a:ext cx="0" cy="2830414"/>
             </a:xfrm>
             <a:custGeom>
               <a:avLst/>
               <a:pathLst>
-                <a:path w="0" h="3139848">
+                <a:path w="0" h="2830414">
                   <a:moveTo>
-                    <a:pt x="0" y="3139848"/>
+                    <a:pt x="0" y="2830414"/>
                   </a:moveTo>
                   <a:lnTo>
                     <a:pt x="0" y="0"/>
@@ -2548,7 +2548,7 @@
                 </a:path>
               </a:pathLst>
             </a:custGeom>
-            <a:ln w="6775" cap="flat">
+            <a:ln w="8623" cap="flat">
               <a:solidFill>
                 <a:srgbClr val="EBEBEB">
                   <a:alpha val="100000"/>
@@ -2572,15 +2572,15 @@
           </p:nvSpPr>
           <p:spPr>
             <a:xfrm>
-              <a:off x="7437265" y="2583293"/>
-              <a:ext cx="0" cy="3139848"/>
+              <a:off x="7440095" y="2782896"/>
+              <a:ext cx="0" cy="2830414"/>
             </a:xfrm>
             <a:custGeom>
               <a:avLst/>
               <a:pathLst>
-                <a:path w="0" h="3139848">
+                <a:path w="0" h="2830414">
                   <a:moveTo>
-                    <a:pt x="0" y="3139848"/>
+                    <a:pt x="0" y="2830414"/>
                   </a:moveTo>
                   <a:lnTo>
                     <a:pt x="0" y="0"/>
@@ -2591,7 +2591,7 @@
                 </a:path>
               </a:pathLst>
             </a:custGeom>
-            <a:ln w="6775" cap="flat">
+            <a:ln w="8623" cap="flat">
               <a:solidFill>
                 <a:srgbClr val="EBEBEB">
                   <a:alpha val="100000"/>
@@ -2615,26 +2615,26 @@
           </p:nvSpPr>
           <p:spPr>
             <a:xfrm>
-              <a:off x="910695" y="5580422"/>
-              <a:ext cx="7706515" cy="0"/>
+              <a:off x="1034151" y="5484655"/>
+              <a:ext cx="7564080" cy="0"/>
             </a:xfrm>
             <a:custGeom>
               <a:avLst/>
               <a:pathLst>
-                <a:path w="7706515" h="0">
+                <a:path w="7564080" h="0">
                   <a:moveTo>
                     <a:pt x="0" y="0"/>
                   </a:moveTo>
                   <a:lnTo>
-                    <a:pt x="7706515" y="0"/>
-                  </a:lnTo>
-                  <a:lnTo>
-                    <a:pt x="7706515" y="0"/>
+                    <a:pt x="7564080" y="0"/>
+                  </a:lnTo>
+                  <a:lnTo>
+                    <a:pt x="7564080" y="0"/>
                   </a:lnTo>
                 </a:path>
               </a:pathLst>
             </a:custGeom>
-            <a:ln w="13550" cap="flat">
+            <a:ln w="17246" cap="flat">
               <a:solidFill>
                 <a:srgbClr val="EBEBEB">
                   <a:alpha val="100000"/>
@@ -2658,26 +2658,26 @@
           </p:nvSpPr>
           <p:spPr>
             <a:xfrm>
-              <a:off x="910695" y="4851369"/>
-              <a:ext cx="7706515" cy="0"/>
+              <a:off x="1034151" y="4827452"/>
+              <a:ext cx="7564080" cy="0"/>
             </a:xfrm>
             <a:custGeom>
               <a:avLst/>
               <a:pathLst>
-                <a:path w="7706515" h="0">
+                <a:path w="7564080" h="0">
                   <a:moveTo>
                     <a:pt x="0" y="0"/>
                   </a:moveTo>
                   <a:lnTo>
-                    <a:pt x="7706515" y="0"/>
-                  </a:lnTo>
-                  <a:lnTo>
-                    <a:pt x="7706515" y="0"/>
+                    <a:pt x="7564080" y="0"/>
+                  </a:lnTo>
+                  <a:lnTo>
+                    <a:pt x="7564080" y="0"/>
                   </a:lnTo>
                 </a:path>
               </a:pathLst>
             </a:custGeom>
-            <a:ln w="13550" cap="flat">
+            <a:ln w="17246" cap="flat">
               <a:solidFill>
                 <a:srgbClr val="EBEBEB">
                   <a:alpha val="100000"/>
@@ -2701,26 +2701,26 @@
           </p:nvSpPr>
           <p:spPr>
             <a:xfrm>
-              <a:off x="910695" y="4122317"/>
-              <a:ext cx="7706515" cy="0"/>
+              <a:off x="1034151" y="4170248"/>
+              <a:ext cx="7564080" cy="0"/>
             </a:xfrm>
             <a:custGeom>
               <a:avLst/>
               <a:pathLst>
-                <a:path w="7706515" h="0">
+                <a:path w="7564080" h="0">
                   <a:moveTo>
                     <a:pt x="0" y="0"/>
                   </a:moveTo>
                   <a:lnTo>
-                    <a:pt x="7706515" y="0"/>
-                  </a:lnTo>
-                  <a:lnTo>
-                    <a:pt x="7706515" y="0"/>
+                    <a:pt x="7564080" y="0"/>
+                  </a:lnTo>
+                  <a:lnTo>
+                    <a:pt x="7564080" y="0"/>
                   </a:lnTo>
                 </a:path>
               </a:pathLst>
             </a:custGeom>
-            <a:ln w="13550" cap="flat">
+            <a:ln w="17246" cap="flat">
               <a:solidFill>
                 <a:srgbClr val="EBEBEB">
                   <a:alpha val="100000"/>
@@ -2744,26 +2744,26 @@
           </p:nvSpPr>
           <p:spPr>
             <a:xfrm>
-              <a:off x="910695" y="3393265"/>
-              <a:ext cx="7706515" cy="0"/>
+              <a:off x="1034151" y="3513045"/>
+              <a:ext cx="7564080" cy="0"/>
             </a:xfrm>
             <a:custGeom>
               <a:avLst/>
               <a:pathLst>
-                <a:path w="7706515" h="0">
+                <a:path w="7564080" h="0">
                   <a:moveTo>
                     <a:pt x="0" y="0"/>
                   </a:moveTo>
                   <a:lnTo>
-                    <a:pt x="7706515" y="0"/>
-                  </a:lnTo>
-                  <a:lnTo>
-                    <a:pt x="7706515" y="0"/>
+                    <a:pt x="7564080" y="0"/>
+                  </a:lnTo>
+                  <a:lnTo>
+                    <a:pt x="7564080" y="0"/>
                   </a:lnTo>
                 </a:path>
               </a:pathLst>
             </a:custGeom>
-            <a:ln w="13550" cap="flat">
+            <a:ln w="17246" cap="flat">
               <a:solidFill>
                 <a:srgbClr val="EBEBEB">
                   <a:alpha val="100000"/>
@@ -2787,26 +2787,26 @@
           </p:nvSpPr>
           <p:spPr>
             <a:xfrm>
-              <a:off x="910695" y="2664213"/>
-              <a:ext cx="7706515" cy="0"/>
+              <a:off x="1034151" y="2855841"/>
+              <a:ext cx="7564080" cy="0"/>
             </a:xfrm>
             <a:custGeom>
               <a:avLst/>
               <a:pathLst>
-                <a:path w="7706515" h="0">
+                <a:path w="7564080" h="0">
                   <a:moveTo>
                     <a:pt x="0" y="0"/>
                   </a:moveTo>
                   <a:lnTo>
-                    <a:pt x="7706515" y="0"/>
-                  </a:lnTo>
-                  <a:lnTo>
-                    <a:pt x="7706515" y="0"/>
+                    <a:pt x="7564080" y="0"/>
+                  </a:lnTo>
+                  <a:lnTo>
+                    <a:pt x="7564080" y="0"/>
                   </a:lnTo>
                 </a:path>
               </a:pathLst>
             </a:custGeom>
-            <a:ln w="13550" cap="flat">
+            <a:ln w="17246" cap="flat">
               <a:solidFill>
                 <a:srgbClr val="EBEBEB">
                   <a:alpha val="100000"/>
@@ -2830,15 +2830,15 @@
           </p:nvSpPr>
           <p:spPr>
             <a:xfrm>
-              <a:off x="984441" y="2583293"/>
-              <a:ext cx="0" cy="3139848"/>
+              <a:off x="1106534" y="2782896"/>
+              <a:ext cx="0" cy="2830414"/>
             </a:xfrm>
             <a:custGeom>
               <a:avLst/>
               <a:pathLst>
-                <a:path w="0" h="3139848">
+                <a:path w="0" h="2830414">
                   <a:moveTo>
-                    <a:pt x="0" y="3139848"/>
+                    <a:pt x="0" y="2830414"/>
                   </a:moveTo>
                   <a:lnTo>
                     <a:pt x="0" y="0"/>
@@ -2849,7 +2849,7 @@
                 </a:path>
               </a:pathLst>
             </a:custGeom>
-            <a:ln w="13550" cap="flat">
+            <a:ln w="17246" cap="flat">
               <a:solidFill>
                 <a:srgbClr val="EBEBEB">
                   <a:alpha val="100000"/>
@@ -2873,15 +2873,15 @@
           </p:nvSpPr>
           <p:spPr>
             <a:xfrm>
-              <a:off x="2828105" y="2583293"/>
-              <a:ext cx="0" cy="3139848"/>
+              <a:off x="2916123" y="2782896"/>
+              <a:ext cx="0" cy="2830414"/>
             </a:xfrm>
             <a:custGeom>
               <a:avLst/>
               <a:pathLst>
-                <a:path w="0" h="3139848">
+                <a:path w="0" h="2830414">
                   <a:moveTo>
-                    <a:pt x="0" y="3139848"/>
+                    <a:pt x="0" y="2830414"/>
                   </a:moveTo>
                   <a:lnTo>
                     <a:pt x="0" y="0"/>
@@ -2892,7 +2892,7 @@
                 </a:path>
               </a:pathLst>
             </a:custGeom>
-            <a:ln w="13550" cap="flat">
+            <a:ln w="17246" cap="flat">
               <a:solidFill>
                 <a:srgbClr val="EBEBEB">
                   <a:alpha val="100000"/>
@@ -2916,15 +2916,15 @@
           </p:nvSpPr>
           <p:spPr>
             <a:xfrm>
-              <a:off x="4671769" y="2583293"/>
-              <a:ext cx="0" cy="3139848"/>
+              <a:off x="4725712" y="2782896"/>
+              <a:ext cx="0" cy="2830414"/>
             </a:xfrm>
             <a:custGeom>
               <a:avLst/>
               <a:pathLst>
-                <a:path w="0" h="3139848">
+                <a:path w="0" h="2830414">
                   <a:moveTo>
-                    <a:pt x="0" y="3139848"/>
+                    <a:pt x="0" y="2830414"/>
                   </a:moveTo>
                   <a:lnTo>
                     <a:pt x="0" y="0"/>
@@ -2935,7 +2935,7 @@
                 </a:path>
               </a:pathLst>
             </a:custGeom>
-            <a:ln w="13550" cap="flat">
+            <a:ln w="17246" cap="flat">
               <a:solidFill>
                 <a:srgbClr val="EBEBEB">
                   <a:alpha val="100000"/>
@@ -2959,15 +2959,15 @@
           </p:nvSpPr>
           <p:spPr>
             <a:xfrm>
-              <a:off x="6515433" y="2583293"/>
-              <a:ext cx="0" cy="3139848"/>
+              <a:off x="6535300" y="2782896"/>
+              <a:ext cx="0" cy="2830414"/>
             </a:xfrm>
             <a:custGeom>
               <a:avLst/>
               <a:pathLst>
-                <a:path w="0" h="3139848">
+                <a:path w="0" h="2830414">
                   <a:moveTo>
-                    <a:pt x="0" y="3139848"/>
+                    <a:pt x="0" y="2830414"/>
                   </a:moveTo>
                   <a:lnTo>
                     <a:pt x="0" y="0"/>
@@ -2978,7 +2978,7 @@
                 </a:path>
               </a:pathLst>
             </a:custGeom>
-            <a:ln w="13550" cap="flat">
+            <a:ln w="17246" cap="flat">
               <a:solidFill>
                 <a:srgbClr val="EBEBEB">
                   <a:alpha val="100000"/>
@@ -3002,15 +3002,15 @@
           </p:nvSpPr>
           <p:spPr>
             <a:xfrm>
-              <a:off x="8359097" y="2583293"/>
-              <a:ext cx="0" cy="3139848"/>
+              <a:off x="8344889" y="2782896"/>
+              <a:ext cx="0" cy="2830414"/>
             </a:xfrm>
             <a:custGeom>
               <a:avLst/>
               <a:pathLst>
-                <a:path w="0" h="3139848">
+                <a:path w="0" h="2830414">
                   <a:moveTo>
-                    <a:pt x="0" y="3139848"/>
+                    <a:pt x="0" y="2830414"/>
                   </a:moveTo>
                   <a:lnTo>
                     <a:pt x="0" y="0"/>
@@ -3021,7 +3021,7 @@
                 </a:path>
               </a:pathLst>
             </a:custGeom>
-            <a:ln w="13550" cap="flat">
+            <a:ln w="17246" cap="flat">
               <a:solidFill>
                 <a:srgbClr val="EBEBEB">
                   <a:alpha val="100000"/>
@@ -3045,135 +3045,135 @@
           </p:nvSpPr>
           <p:spPr>
             <a:xfrm>
-              <a:off x="1260991" y="4368116"/>
-              <a:ext cx="7005923" cy="1135911"/>
+              <a:off x="1377973" y="4391823"/>
+              <a:ext cx="6876437" cy="1023966"/>
             </a:xfrm>
             <a:custGeom>
               <a:avLst/>
               <a:pathLst>
-                <a:path w="7005923" h="1135911">
+                <a:path w="6876437" h="1023966">
                   <a:moveTo>
-                    <a:pt x="0" y="1135911"/>
+                    <a:pt x="0" y="1023966"/>
                   </a:moveTo>
                   <a:lnTo>
-                    <a:pt x="276549" y="1135911"/>
-                  </a:lnTo>
-                  <a:lnTo>
-                    <a:pt x="276549" y="1096955"/>
-                  </a:lnTo>
-                  <a:lnTo>
-                    <a:pt x="368732" y="1096955"/>
-                  </a:lnTo>
-                  <a:lnTo>
-                    <a:pt x="368732" y="980848"/>
-                  </a:lnTo>
-                  <a:lnTo>
-                    <a:pt x="553099" y="980848"/>
-                  </a:lnTo>
-                  <a:lnTo>
-                    <a:pt x="553099" y="901658"/>
-                  </a:lnTo>
-                  <a:lnTo>
-                    <a:pt x="737465" y="901658"/>
-                  </a:lnTo>
-                  <a:lnTo>
-                    <a:pt x="737465" y="861715"/>
-                  </a:lnTo>
-                  <a:lnTo>
-                    <a:pt x="829648" y="861715"/>
-                  </a:lnTo>
-                  <a:lnTo>
-                    <a:pt x="829648" y="821397"/>
-                  </a:lnTo>
-                  <a:lnTo>
-                    <a:pt x="921832" y="821397"/>
-                  </a:lnTo>
-                  <a:lnTo>
-                    <a:pt x="921832" y="739403"/>
-                  </a:lnTo>
-                  <a:lnTo>
-                    <a:pt x="1198381" y="739403"/>
-                  </a:lnTo>
-                  <a:lnTo>
-                    <a:pt x="1198381" y="697219"/>
-                  </a:lnTo>
-                  <a:lnTo>
-                    <a:pt x="1382748" y="697219"/>
-                  </a:lnTo>
-                  <a:lnTo>
-                    <a:pt x="1382748" y="655076"/>
-                  </a:lnTo>
-                  <a:lnTo>
-                    <a:pt x="1474931" y="655076"/>
-                  </a:lnTo>
-                  <a:lnTo>
-                    <a:pt x="1474931" y="571260"/>
-                  </a:lnTo>
-                  <a:lnTo>
-                    <a:pt x="1843664" y="571260"/>
-                  </a:lnTo>
-                  <a:lnTo>
-                    <a:pt x="1843664" y="528497"/>
-                  </a:lnTo>
-                  <a:lnTo>
-                    <a:pt x="2120213" y="528497"/>
-                  </a:lnTo>
-                  <a:lnTo>
-                    <a:pt x="2120213" y="485797"/>
-                  </a:lnTo>
-                  <a:lnTo>
-                    <a:pt x="2304580" y="485797"/>
-                  </a:lnTo>
-                  <a:lnTo>
-                    <a:pt x="2304580" y="443006"/>
-                  </a:lnTo>
-                  <a:lnTo>
-                    <a:pt x="2396763" y="443006"/>
-                  </a:lnTo>
-                  <a:lnTo>
-                    <a:pt x="2396763" y="356145"/>
-                  </a:lnTo>
-                  <a:lnTo>
-                    <a:pt x="2857679" y="356145"/>
-                  </a:lnTo>
-                  <a:lnTo>
-                    <a:pt x="2857679" y="311903"/>
-                  </a:lnTo>
-                  <a:lnTo>
-                    <a:pt x="3134228" y="311903"/>
-                  </a:lnTo>
-                  <a:lnTo>
-                    <a:pt x="3134228" y="267829"/>
-                  </a:lnTo>
-                  <a:lnTo>
-                    <a:pt x="3410778" y="267829"/>
-                  </a:lnTo>
-                  <a:lnTo>
-                    <a:pt x="3410778" y="223838"/>
-                  </a:lnTo>
-                  <a:lnTo>
-                    <a:pt x="3963877" y="223838"/>
-                  </a:lnTo>
-                  <a:lnTo>
-                    <a:pt x="3963877" y="179836"/>
-                  </a:lnTo>
-                  <a:lnTo>
-                    <a:pt x="4424793" y="179836"/>
-                  </a:lnTo>
-                  <a:lnTo>
-                    <a:pt x="4424793" y="135204"/>
-                  </a:lnTo>
-                  <a:lnTo>
-                    <a:pt x="6913740" y="135204"/>
-                  </a:lnTo>
-                  <a:lnTo>
-                    <a:pt x="6913740" y="46025"/>
-                  </a:lnTo>
-                  <a:lnTo>
-                    <a:pt x="7005923" y="46025"/>
-                  </a:lnTo>
-                  <a:lnTo>
-                    <a:pt x="7005923" y="0"/>
+                    <a:pt x="271438" y="1023966"/>
+                  </a:lnTo>
+                  <a:lnTo>
+                    <a:pt x="271438" y="988849"/>
+                  </a:lnTo>
+                  <a:lnTo>
+                    <a:pt x="361917" y="988849"/>
+                  </a:lnTo>
+                  <a:lnTo>
+                    <a:pt x="361917" y="884185"/>
+                  </a:lnTo>
+                  <a:lnTo>
+                    <a:pt x="542876" y="884185"/>
+                  </a:lnTo>
+                  <a:lnTo>
+                    <a:pt x="542876" y="812799"/>
+                  </a:lnTo>
+                  <a:lnTo>
+                    <a:pt x="723835" y="812799"/>
+                  </a:lnTo>
+                  <a:lnTo>
+                    <a:pt x="723835" y="776793"/>
+                  </a:lnTo>
+                  <a:lnTo>
+                    <a:pt x="814314" y="776793"/>
+                  </a:lnTo>
+                  <a:lnTo>
+                    <a:pt x="814314" y="740448"/>
+                  </a:lnTo>
+                  <a:lnTo>
+                    <a:pt x="904794" y="740448"/>
+                  </a:lnTo>
+                  <a:lnTo>
+                    <a:pt x="904794" y="666534"/>
+                  </a:lnTo>
+                  <a:lnTo>
+                    <a:pt x="1176232" y="666534"/>
+                  </a:lnTo>
+                  <a:lnTo>
+                    <a:pt x="1176232" y="628508"/>
+                  </a:lnTo>
+                  <a:lnTo>
+                    <a:pt x="1357191" y="628508"/>
+                  </a:lnTo>
+                  <a:lnTo>
+                    <a:pt x="1357191" y="590518"/>
+                  </a:lnTo>
+                  <a:lnTo>
+                    <a:pt x="1447670" y="590518"/>
+                  </a:lnTo>
+                  <a:lnTo>
+                    <a:pt x="1447670" y="514962"/>
+                  </a:lnTo>
+                  <a:lnTo>
+                    <a:pt x="1809588" y="514962"/>
+                  </a:lnTo>
+                  <a:lnTo>
+                    <a:pt x="1809588" y="476413"/>
+                  </a:lnTo>
+                  <a:lnTo>
+                    <a:pt x="2081027" y="476413"/>
+                  </a:lnTo>
+                  <a:lnTo>
+                    <a:pt x="2081027" y="437921"/>
+                  </a:lnTo>
+                  <a:lnTo>
+                    <a:pt x="2261985" y="437921"/>
+                  </a:lnTo>
+                  <a:lnTo>
+                    <a:pt x="2261985" y="399348"/>
+                  </a:lnTo>
+                  <a:lnTo>
+                    <a:pt x="2352465" y="399348"/>
+                  </a:lnTo>
+                  <a:lnTo>
+                    <a:pt x="2352465" y="321046"/>
+                  </a:lnTo>
+                  <a:lnTo>
+                    <a:pt x="2804862" y="321046"/>
+                  </a:lnTo>
+                  <a:lnTo>
+                    <a:pt x="2804862" y="281164"/>
+                  </a:lnTo>
+                  <a:lnTo>
+                    <a:pt x="3076300" y="281164"/>
+                  </a:lnTo>
+                  <a:lnTo>
+                    <a:pt x="3076300" y="241434"/>
+                  </a:lnTo>
+                  <a:lnTo>
+                    <a:pt x="3347739" y="241434"/>
+                  </a:lnTo>
+                  <a:lnTo>
+                    <a:pt x="3347739" y="201778"/>
+                  </a:lnTo>
+                  <a:lnTo>
+                    <a:pt x="3890615" y="201778"/>
+                  </a:lnTo>
+                  <a:lnTo>
+                    <a:pt x="3890615" y="162113"/>
+                  </a:lnTo>
+                  <a:lnTo>
+                    <a:pt x="4343012" y="162113"/>
+                  </a:lnTo>
+                  <a:lnTo>
+                    <a:pt x="4343012" y="121880"/>
+                  </a:lnTo>
+                  <a:lnTo>
+                    <a:pt x="6785957" y="121880"/>
+                  </a:lnTo>
+                  <a:lnTo>
+                    <a:pt x="6785957" y="41489"/>
+                  </a:lnTo>
+                  <a:lnTo>
+                    <a:pt x="6876437" y="41489"/>
+                  </a:lnTo>
+                  <a:lnTo>
+                    <a:pt x="6876437" y="0"/>
                   </a:lnTo>
                 </a:path>
               </a:pathLst>
@@ -3202,135 +3202,135 @@
           </p:nvSpPr>
           <p:spPr>
             <a:xfrm>
-              <a:off x="1260991" y="2861938"/>
-              <a:ext cx="7005923" cy="2521417"/>
+              <a:off x="1377973" y="3034080"/>
+              <a:ext cx="6876437" cy="2272930"/>
             </a:xfrm>
             <a:custGeom>
               <a:avLst/>
               <a:pathLst>
-                <a:path w="7005923" h="2521417">
+                <a:path w="6876437" h="2272930">
                   <a:moveTo>
-                    <a:pt x="0" y="2521417"/>
+                    <a:pt x="0" y="2272930"/>
                   </a:moveTo>
                   <a:lnTo>
-                    <a:pt x="276549" y="2521417"/>
-                  </a:lnTo>
-                  <a:lnTo>
-                    <a:pt x="276549" y="2422329"/>
-                  </a:lnTo>
-                  <a:lnTo>
-                    <a:pt x="368732" y="2422329"/>
-                  </a:lnTo>
-                  <a:lnTo>
-                    <a:pt x="368732" y="2132572"/>
-                  </a:lnTo>
-                  <a:lnTo>
-                    <a:pt x="553099" y="2132572"/>
-                  </a:lnTo>
-                  <a:lnTo>
-                    <a:pt x="553099" y="1939675"/>
-                  </a:lnTo>
-                  <a:lnTo>
-                    <a:pt x="737465" y="1939675"/>
-                  </a:lnTo>
-                  <a:lnTo>
-                    <a:pt x="737465" y="1843816"/>
-                  </a:lnTo>
-                  <a:lnTo>
-                    <a:pt x="829648" y="1843816"/>
-                  </a:lnTo>
-                  <a:lnTo>
-                    <a:pt x="829648" y="1748029"/>
-                  </a:lnTo>
-                  <a:lnTo>
-                    <a:pt x="921832" y="1748029"/>
-                  </a:lnTo>
-                  <a:lnTo>
-                    <a:pt x="921832" y="1556216"/>
-                  </a:lnTo>
-                  <a:lnTo>
-                    <a:pt x="1198381" y="1556216"/>
-                  </a:lnTo>
-                  <a:lnTo>
-                    <a:pt x="1198381" y="1459081"/>
-                  </a:lnTo>
-                  <a:lnTo>
-                    <a:pt x="1382748" y="1459081"/>
-                  </a:lnTo>
-                  <a:lnTo>
-                    <a:pt x="1382748" y="1363082"/>
-                  </a:lnTo>
-                  <a:lnTo>
-                    <a:pt x="1474931" y="1363082"/>
-                  </a:lnTo>
-                  <a:lnTo>
-                    <a:pt x="1474931" y="1175222"/>
-                  </a:lnTo>
-                  <a:lnTo>
-                    <a:pt x="1843664" y="1175222"/>
-                  </a:lnTo>
-                  <a:lnTo>
-                    <a:pt x="1843664" y="1080937"/>
-                  </a:lnTo>
-                  <a:lnTo>
-                    <a:pt x="2120213" y="1080937"/>
-                  </a:lnTo>
-                  <a:lnTo>
-                    <a:pt x="2120213" y="987836"/>
-                  </a:lnTo>
-                  <a:lnTo>
-                    <a:pt x="2304580" y="987836"/>
-                  </a:lnTo>
-                  <a:lnTo>
-                    <a:pt x="2304580" y="895575"/>
-                  </a:lnTo>
-                  <a:lnTo>
-                    <a:pt x="2396763" y="895575"/>
-                  </a:lnTo>
-                  <a:lnTo>
-                    <a:pt x="2396763" y="711467"/>
-                  </a:lnTo>
-                  <a:lnTo>
-                    <a:pt x="2857679" y="711467"/>
-                  </a:lnTo>
-                  <a:lnTo>
-                    <a:pt x="2857679" y="619315"/>
-                  </a:lnTo>
-                  <a:lnTo>
-                    <a:pt x="3134228" y="619315"/>
-                  </a:lnTo>
-                  <a:lnTo>
-                    <a:pt x="3134228" y="528590"/>
-                  </a:lnTo>
-                  <a:lnTo>
-                    <a:pt x="3410778" y="528590"/>
-                  </a:lnTo>
-                  <a:lnTo>
-                    <a:pt x="3410778" y="439102"/>
-                  </a:lnTo>
-                  <a:lnTo>
-                    <a:pt x="3963877" y="439102"/>
-                  </a:lnTo>
-                  <a:lnTo>
-                    <a:pt x="3963877" y="350650"/>
-                  </a:lnTo>
-                  <a:lnTo>
-                    <a:pt x="4424793" y="350650"/>
-                  </a:lnTo>
-                  <a:lnTo>
-                    <a:pt x="4424793" y="262006"/>
-                  </a:lnTo>
-                  <a:lnTo>
-                    <a:pt x="6913740" y="262006"/>
-                  </a:lnTo>
-                  <a:lnTo>
-                    <a:pt x="6913740" y="88096"/>
-                  </a:lnTo>
-                  <a:lnTo>
-                    <a:pt x="7005923" y="88096"/>
-                  </a:lnTo>
-                  <a:lnTo>
-                    <a:pt x="7005923" y="0"/>
+                    <a:pt x="271438" y="2272930"/>
+                  </a:lnTo>
+                  <a:lnTo>
+                    <a:pt x="271438" y="2183607"/>
+                  </a:lnTo>
+                  <a:lnTo>
+                    <a:pt x="361917" y="2183607"/>
+                  </a:lnTo>
+                  <a:lnTo>
+                    <a:pt x="361917" y="1922405"/>
+                  </a:lnTo>
+                  <a:lnTo>
+                    <a:pt x="542876" y="1922405"/>
+                  </a:lnTo>
+                  <a:lnTo>
+                    <a:pt x="542876" y="1748518"/>
+                  </a:lnTo>
+                  <a:lnTo>
+                    <a:pt x="723835" y="1748518"/>
+                  </a:lnTo>
+                  <a:lnTo>
+                    <a:pt x="723835" y="1662107"/>
+                  </a:lnTo>
+                  <a:lnTo>
+                    <a:pt x="814314" y="1662107"/>
+                  </a:lnTo>
+                  <a:lnTo>
+                    <a:pt x="814314" y="1575760"/>
+                  </a:lnTo>
+                  <a:lnTo>
+                    <a:pt x="904794" y="1575760"/>
+                  </a:lnTo>
+                  <a:lnTo>
+                    <a:pt x="904794" y="1402850"/>
+                  </a:lnTo>
+                  <a:lnTo>
+                    <a:pt x="1176232" y="1402850"/>
+                  </a:lnTo>
+                  <a:lnTo>
+                    <a:pt x="1176232" y="1315288"/>
+                  </a:lnTo>
+                  <a:lnTo>
+                    <a:pt x="1357191" y="1315288"/>
+                  </a:lnTo>
+                  <a:lnTo>
+                    <a:pt x="1357191" y="1228749"/>
+                  </a:lnTo>
+                  <a:lnTo>
+                    <a:pt x="1447670" y="1228749"/>
+                  </a:lnTo>
+                  <a:lnTo>
+                    <a:pt x="1447670" y="1059403"/>
+                  </a:lnTo>
+                  <a:lnTo>
+                    <a:pt x="1809588" y="1059403"/>
+                  </a:lnTo>
+                  <a:lnTo>
+                    <a:pt x="1809588" y="974410"/>
+                  </a:lnTo>
+                  <a:lnTo>
+                    <a:pt x="2081027" y="974410"/>
+                  </a:lnTo>
+                  <a:lnTo>
+                    <a:pt x="2081027" y="890484"/>
+                  </a:lnTo>
+                  <a:lnTo>
+                    <a:pt x="2261985" y="890484"/>
+                  </a:lnTo>
+                  <a:lnTo>
+                    <a:pt x="2261985" y="807315"/>
+                  </a:lnTo>
+                  <a:lnTo>
+                    <a:pt x="2352465" y="807315"/>
+                  </a:lnTo>
+                  <a:lnTo>
+                    <a:pt x="2352465" y="641352"/>
+                  </a:lnTo>
+                  <a:lnTo>
+                    <a:pt x="2804862" y="641352"/>
+                  </a:lnTo>
+                  <a:lnTo>
+                    <a:pt x="2804862" y="558281"/>
+                  </a:lnTo>
+                  <a:lnTo>
+                    <a:pt x="3076300" y="558281"/>
+                  </a:lnTo>
+                  <a:lnTo>
+                    <a:pt x="3076300" y="476497"/>
+                  </a:lnTo>
+                  <a:lnTo>
+                    <a:pt x="3347739" y="476497"/>
+                  </a:lnTo>
+                  <a:lnTo>
+                    <a:pt x="3347739" y="395828"/>
+                  </a:lnTo>
+                  <a:lnTo>
+                    <a:pt x="3890615" y="395828"/>
+                  </a:lnTo>
+                  <a:lnTo>
+                    <a:pt x="3890615" y="316093"/>
+                  </a:lnTo>
+                  <a:lnTo>
+                    <a:pt x="4343012" y="316093"/>
+                  </a:lnTo>
+                  <a:lnTo>
+                    <a:pt x="4343012" y="236185"/>
+                  </a:lnTo>
+                  <a:lnTo>
+                    <a:pt x="6785957" y="236185"/>
+                  </a:lnTo>
+                  <a:lnTo>
+                    <a:pt x="6785957" y="79414"/>
+                  </a:lnTo>
+                  <a:lnTo>
+                    <a:pt x="6876437" y="79414"/>
+                  </a:lnTo>
+                  <a:lnTo>
+                    <a:pt x="6876437" y="0"/>
                   </a:lnTo>
                 </a:path>
               </a:pathLst>
@@ -3359,8 +3359,8 @@
           </p:nvSpPr>
           <p:spPr>
             <a:xfrm>
-              <a:off x="692708" y="5540371"/>
-              <a:ext cx="155356" cy="80101"/>
+              <a:off x="756929" y="5433678"/>
+              <a:ext cx="197510" cy="101955"/>
             </a:xfrm>
             <a:prstGeom prst="rect">
               <a:avLst/>
@@ -3373,7 +3373,7 @@
             <a:p>
               <a:pPr algn="l" marL="0" marR="0" indent="0">
                 <a:lnSpc>
-                  <a:spcPts val="880"/>
+                  <a:spcPts val="1120"/>
                 </a:lnSpc>
                 <a:spcBef>
                   <a:spcPts val="0"/>
@@ -3383,7 +3383,7 @@
                 </a:spcAft>
               </a:pPr>
               <a:r>
-                <a:rPr sz="880">
+                <a:rPr sz="1120">
                   <a:solidFill>
                     <a:srgbClr val="4D4D4D">
                       <a:alpha val="100000"/>
@@ -3405,8 +3405,8 @@
           </p:nvSpPr>
           <p:spPr>
             <a:xfrm>
-              <a:off x="692708" y="4811319"/>
-              <a:ext cx="155356" cy="80101"/>
+              <a:off x="756929" y="4776474"/>
+              <a:ext cx="197510" cy="101955"/>
             </a:xfrm>
             <a:prstGeom prst="rect">
               <a:avLst/>
@@ -3419,7 +3419,7 @@
             <a:p>
               <a:pPr algn="l" marL="0" marR="0" indent="0">
                 <a:lnSpc>
-                  <a:spcPts val="880"/>
+                  <a:spcPts val="1120"/>
                 </a:lnSpc>
                 <a:spcBef>
                   <a:spcPts val="0"/>
@@ -3429,7 +3429,7 @@
                 </a:spcAft>
               </a:pPr>
               <a:r>
-                <a:rPr sz="880">
+                <a:rPr sz="1120">
                   <a:solidFill>
                     <a:srgbClr val="4D4D4D">
                       <a:alpha val="100000"/>
@@ -3451,8 +3451,8 @@
           </p:nvSpPr>
           <p:spPr>
             <a:xfrm>
-              <a:off x="692708" y="4082266"/>
-              <a:ext cx="155356" cy="80101"/>
+              <a:off x="756929" y="4119270"/>
+              <a:ext cx="197510" cy="101955"/>
             </a:xfrm>
             <a:prstGeom prst="rect">
               <a:avLst/>
@@ -3465,7 +3465,7 @@
             <a:p>
               <a:pPr algn="l" marL="0" marR="0" indent="0">
                 <a:lnSpc>
-                  <a:spcPts val="880"/>
+                  <a:spcPts val="1120"/>
                 </a:lnSpc>
                 <a:spcBef>
                   <a:spcPts val="0"/>
@@ -3475,7 +3475,7 @@
                 </a:spcAft>
               </a:pPr>
               <a:r>
-                <a:rPr sz="880">
+                <a:rPr sz="1120">
                   <a:solidFill>
                     <a:srgbClr val="4D4D4D">
                       <a:alpha val="100000"/>
@@ -3497,8 +3497,8 @@
           </p:nvSpPr>
           <p:spPr>
             <a:xfrm>
-              <a:off x="692708" y="3353214"/>
-              <a:ext cx="155356" cy="80101"/>
+              <a:off x="756929" y="3462067"/>
+              <a:ext cx="197510" cy="101955"/>
             </a:xfrm>
             <a:prstGeom prst="rect">
               <a:avLst/>
@@ -3511,7 +3511,7 @@
             <a:p>
               <a:pPr algn="l" marL="0" marR="0" indent="0">
                 <a:lnSpc>
-                  <a:spcPts val="880"/>
+                  <a:spcPts val="1120"/>
                 </a:lnSpc>
                 <a:spcBef>
                   <a:spcPts val="0"/>
@@ -3521,7 +3521,7 @@
                 </a:spcAft>
               </a:pPr>
               <a:r>
-                <a:rPr sz="880">
+                <a:rPr sz="1120">
                   <a:solidFill>
                     <a:srgbClr val="4D4D4D">
                       <a:alpha val="100000"/>
@@ -3543,8 +3543,8 @@
           </p:nvSpPr>
           <p:spPr>
             <a:xfrm>
-              <a:off x="692708" y="2624162"/>
-              <a:ext cx="155356" cy="80101"/>
+              <a:off x="756929" y="2804863"/>
+              <a:ext cx="197510" cy="101955"/>
             </a:xfrm>
             <a:prstGeom prst="rect">
               <a:avLst/>
@@ -3557,7 +3557,7 @@
             <a:p>
               <a:pPr algn="l" marL="0" marR="0" indent="0">
                 <a:lnSpc>
-                  <a:spcPts val="880"/>
+                  <a:spcPts val="1120"/>
                 </a:lnSpc>
                 <a:spcBef>
                   <a:spcPts val="0"/>
@@ -3567,7 +3567,7 @@
                 </a:spcAft>
               </a:pPr>
               <a:r>
-                <a:rPr sz="880">
+                <a:rPr sz="1120">
                   <a:solidFill>
                     <a:srgbClr val="4D4D4D">
                       <a:alpha val="100000"/>
@@ -3589,8 +3589,8 @@
           </p:nvSpPr>
           <p:spPr>
             <a:xfrm>
-              <a:off x="953352" y="5785772"/>
-              <a:ext cx="62179" cy="80101"/>
+              <a:off x="1067032" y="5693022"/>
+              <a:ext cx="79004" cy="101955"/>
             </a:xfrm>
             <a:prstGeom prst="rect">
               <a:avLst/>
@@ -3603,7 +3603,7 @@
             <a:p>
               <a:pPr algn="l" marL="0" marR="0" indent="0">
                 <a:lnSpc>
-                  <a:spcPts val="880"/>
+                  <a:spcPts val="1120"/>
                 </a:lnSpc>
                 <a:spcBef>
                   <a:spcPts val="0"/>
@@ -3613,7 +3613,7 @@
                 </a:spcAft>
               </a:pPr>
               <a:r>
-                <a:rPr sz="880">
+                <a:rPr sz="1120">
                   <a:solidFill>
                     <a:srgbClr val="4D4D4D">
                       <a:alpha val="100000"/>
@@ -3635,8 +3635,8 @@
           </p:nvSpPr>
           <p:spPr>
             <a:xfrm>
-              <a:off x="2765926" y="5785772"/>
-              <a:ext cx="124358" cy="80101"/>
+              <a:off x="2837119" y="5693022"/>
+              <a:ext cx="158008" cy="101955"/>
             </a:xfrm>
             <a:prstGeom prst="rect">
               <a:avLst/>
@@ -3649,7 +3649,7 @@
             <a:p>
               <a:pPr algn="l" marL="0" marR="0" indent="0">
                 <a:lnSpc>
-                  <a:spcPts val="880"/>
+                  <a:spcPts val="1120"/>
                 </a:lnSpc>
                 <a:spcBef>
                   <a:spcPts val="0"/>
@@ -3659,7 +3659,7 @@
                 </a:spcAft>
               </a:pPr>
               <a:r>
-                <a:rPr sz="880">
+                <a:rPr sz="1120">
                   <a:solidFill>
                     <a:srgbClr val="4D4D4D">
                       <a:alpha val="100000"/>
@@ -3681,8 +3681,8 @@
           </p:nvSpPr>
           <p:spPr>
             <a:xfrm>
-              <a:off x="4609590" y="5785772"/>
-              <a:ext cx="124358" cy="80101"/>
+              <a:off x="4646708" y="5693022"/>
+              <a:ext cx="158008" cy="101955"/>
             </a:xfrm>
             <a:prstGeom prst="rect">
               <a:avLst/>
@@ -3695,7 +3695,7 @@
             <a:p>
               <a:pPr algn="l" marL="0" marR="0" indent="0">
                 <a:lnSpc>
-                  <a:spcPts val="880"/>
+                  <a:spcPts val="1120"/>
                 </a:lnSpc>
                 <a:spcBef>
                   <a:spcPts val="0"/>
@@ -3705,7 +3705,7 @@
                 </a:spcAft>
               </a:pPr>
               <a:r>
-                <a:rPr sz="880">
+                <a:rPr sz="1120">
                   <a:solidFill>
                     <a:srgbClr val="4D4D4D">
                       <a:alpha val="100000"/>
@@ -3727,8 +3727,8 @@
           </p:nvSpPr>
           <p:spPr>
             <a:xfrm>
-              <a:off x="6453254" y="5785772"/>
-              <a:ext cx="124358" cy="80101"/>
+              <a:off x="6456296" y="5693022"/>
+              <a:ext cx="158008" cy="101955"/>
             </a:xfrm>
             <a:prstGeom prst="rect">
               <a:avLst/>
@@ -3741,7 +3741,7 @@
             <a:p>
               <a:pPr algn="l" marL="0" marR="0" indent="0">
                 <a:lnSpc>
-                  <a:spcPts val="880"/>
+                  <a:spcPts val="1120"/>
                 </a:lnSpc>
                 <a:spcBef>
                   <a:spcPts val="0"/>
@@ -3751,7 +3751,7 @@
                 </a:spcAft>
               </a:pPr>
               <a:r>
-                <a:rPr sz="880">
+                <a:rPr sz="1120">
                   <a:solidFill>
                     <a:srgbClr val="4D4D4D">
                       <a:alpha val="100000"/>
@@ -3773,8 +3773,8 @@
           </p:nvSpPr>
           <p:spPr>
             <a:xfrm>
-              <a:off x="8296918" y="5785772"/>
-              <a:ext cx="124358" cy="80101"/>
+              <a:off x="8265885" y="5693022"/>
+              <a:ext cx="158008" cy="101955"/>
             </a:xfrm>
             <a:prstGeom prst="rect">
               <a:avLst/>
@@ -3787,7 +3787,7 @@
             <a:p>
               <a:pPr algn="l" marL="0" marR="0" indent="0">
                 <a:lnSpc>
-                  <a:spcPts val="880"/>
+                  <a:spcPts val="1120"/>
                 </a:lnSpc>
                 <a:spcBef>
                   <a:spcPts val="0"/>
@@ -3797,7 +3797,7 @@
                 </a:spcAft>
               </a:pPr>
               <a:r>
-                <a:rPr sz="880">
+                <a:rPr sz="1120">
                   <a:solidFill>
                     <a:srgbClr val="4D4D4D">
                       <a:alpha val="100000"/>
@@ -3819,8 +3819,8 @@
           </p:nvSpPr>
           <p:spPr>
             <a:xfrm>
-              <a:off x="4166072" y="5925448"/>
-              <a:ext cx="1195760" cy="100218"/>
+              <a:off x="4055456" y="5870717"/>
+              <a:ext cx="1521470" cy="127558"/>
             </a:xfrm>
             <a:prstGeom prst="rect">
               <a:avLst/>
@@ -3833,7 +3833,7 @@
             <a:p>
               <a:pPr algn="l" marL="0" marR="0" indent="0">
                 <a:lnSpc>
-                  <a:spcPts val="1100"/>
+                  <a:spcPts val="1400"/>
                 </a:lnSpc>
                 <a:spcBef>
                   <a:spcPts val="0"/>
@@ -3843,7 +3843,7 @@
                 </a:spcAft>
               </a:pPr>
               <a:r>
-                <a:rPr sz="1100">
+                <a:rPr sz="1400">
                   <a:solidFill>
                     <a:srgbClr val="000000">
                       <a:alpha val="100000"/>
@@ -3865,8 +3865,8 @@
           </p:nvSpPr>
           <p:spPr>
             <a:xfrm rot="-5400000">
-              <a:off x="-87047" y="4103109"/>
-              <a:ext cx="1327891" cy="100218"/>
+              <a:off x="-235221" y="4134324"/>
+              <a:ext cx="1689536" cy="127558"/>
             </a:xfrm>
             <a:prstGeom prst="rect">
               <a:avLst/>
@@ -3879,7 +3879,7 @@
             <a:p>
               <a:pPr algn="l" marL="0" marR="0" indent="0">
                 <a:lnSpc>
-                  <a:spcPts val="1100"/>
+                  <a:spcPts val="1400"/>
                 </a:lnSpc>
                 <a:spcBef>
                   <a:spcPts val="0"/>
@@ -3889,7 +3889,7 @@
                 </a:spcAft>
               </a:pPr>
               <a:r>
-                <a:rPr sz="1100">
+                <a:rPr sz="1400">
                   <a:solidFill>
                     <a:srgbClr val="000000">
                       <a:alpha val="100000"/>
@@ -3911,7 +3911,7 @@
           </p:nvSpPr>
           <p:spPr>
             <a:xfrm>
-              <a:off x="3547476" y="2264798"/>
+              <a:off x="3323124" y="2407465"/>
               <a:ext cx="175564" cy="0"/>
             </a:xfrm>
             <a:custGeom>
@@ -3951,7 +3951,7 @@
           </p:nvSpPr>
           <p:spPr>
             <a:xfrm>
-              <a:off x="4788049" y="2264798"/>
+              <a:off x="4840953" y="2407465"/>
               <a:ext cx="175564" cy="0"/>
             </a:xfrm>
             <a:custGeom>
@@ -3991,8 +3991,8 @@
           </p:nvSpPr>
           <p:spPr>
             <a:xfrm>
-              <a:off x="3814575" y="2224748"/>
-              <a:ext cx="881938" cy="80101"/>
+              <a:off x="3609202" y="2356487"/>
+              <a:ext cx="1121237" cy="101955"/>
             </a:xfrm>
             <a:prstGeom prst="rect">
               <a:avLst/>
@@ -4005,7 +4005,7 @@
             <a:p>
               <a:pPr algn="l" marL="0" marR="0" indent="0">
                 <a:lnSpc>
-                  <a:spcPts val="880"/>
+                  <a:spcPts val="1120"/>
                 </a:lnSpc>
                 <a:spcBef>
                   <a:spcPts val="0"/>
@@ -4015,7 +4015,7 @@
                 </a:spcAft>
               </a:pPr>
               <a:r>
-                <a:rPr sz="880">
+                <a:rPr sz="1120">
                   <a:solidFill>
                     <a:srgbClr val="000000">
                       <a:alpha val="100000"/>
@@ -4037,8 +4037,8 @@
           </p:nvSpPr>
           <p:spPr>
             <a:xfrm>
-              <a:off x="5055148" y="2224748"/>
-              <a:ext cx="947226" cy="80101"/>
+              <a:off x="5127031" y="2356487"/>
+              <a:ext cx="1204173" cy="101955"/>
             </a:xfrm>
             <a:prstGeom prst="rect">
               <a:avLst/>
@@ -4051,7 +4051,7 @@
             <a:p>
               <a:pPr algn="l" marL="0" marR="0" indent="0">
                 <a:lnSpc>
-                  <a:spcPts val="880"/>
+                  <a:spcPts val="1120"/>
                 </a:lnSpc>
                 <a:spcBef>
                   <a:spcPts val="0"/>
@@ -4061,7 +4061,7 @@
                 </a:spcAft>
               </a:pPr>
               <a:r>
-                <a:rPr sz="880">
+                <a:rPr sz="1120">
                   <a:solidFill>
                     <a:srgbClr val="000000">
                       <a:alpha val="100000"/>
@@ -4083,8 +4083,8 @@
           </p:nvSpPr>
           <p:spPr>
             <a:xfrm>
-              <a:off x="910695" y="1896563"/>
-              <a:ext cx="3913906" cy="91165"/>
+              <a:off x="1034151" y="1977589"/>
+              <a:ext cx="4697455" cy="109362"/>
             </a:xfrm>
             <a:prstGeom prst="rect">
               <a:avLst/>
@@ -4097,7 +4097,7 @@
             <a:p>
               <a:pPr algn="l" marL="0" marR="0" indent="0">
                 <a:lnSpc>
-                  <a:spcPts val="1000"/>
+                  <a:spcPts val="1200"/>
                 </a:lnSpc>
                 <a:spcBef>
                   <a:spcPts val="0"/>
@@ -4107,7 +4107,7 @@
                 </a:spcAft>
               </a:pPr>
               <a:r>
-                <a:rPr sz="1000">
+                <a:rPr sz="1200">
                   <a:solidFill>
                     <a:srgbClr val="404040">
                       <a:alpha val="100000"/>
@@ -4129,8 +4129,8 @@
           </p:nvSpPr>
           <p:spPr>
             <a:xfrm>
-              <a:off x="910695" y="1669789"/>
-              <a:ext cx="1666676" cy="120152"/>
+              <a:off x="1034151" y="1688767"/>
+              <a:ext cx="2121682" cy="153070"/>
             </a:xfrm>
             <a:prstGeom prst="rect">
               <a:avLst/>
@@ -4143,7 +4143,7 @@
             <a:p>
               <a:pPr algn="l" marL="0" marR="0" indent="0">
                 <a:lnSpc>
-                  <a:spcPts val="1320"/>
+                  <a:spcPts val="1680"/>
                 </a:lnSpc>
                 <a:spcBef>
                   <a:spcPts val="0"/>
@@ -4153,7 +4153,7 @@
                 </a:spcAft>
               </a:pPr>
               <a:r>
-                <a:rPr sz="1320">
+                <a:rPr sz="1680">
                   <a:solidFill>
                     <a:srgbClr val="000000">
                       <a:alpha val="100000"/>
